--- a/Song Template 1.pptx
+++ b/Song Template 1.pptx
@@ -3373,14 +3373,14 @@
             <a:pPr algn="ctr"/>
             <a:r>
               <a:rPr lang="en-US" sz="3600" b="1">
-                <a:latin typeface="Arial Bold" panose="020B0704020202020204" charset="0"/>
-                <a:cs typeface="Arial Bold" panose="020B0704020202020204" charset="0"/>
+                <a:latin typeface="Courier New Bold" panose="02070609020205020404" charset="0"/>
+                <a:cs typeface="Courier New Bold" panose="02070609020205020404" charset="0"/>
               </a:rPr>
               <a:t>[ TITLE ]</a:t>
             </a:r>
             <a:endParaRPr lang="en-US" sz="3600" b="1">
-              <a:latin typeface="Arial Bold" panose="020B0704020202020204" charset="0"/>
-              <a:cs typeface="Arial Bold" panose="020B0704020202020204" charset="0"/>
+              <a:latin typeface="Courier New Bold" panose="02070609020205020404" charset="0"/>
+              <a:cs typeface="Courier New Bold" panose="02070609020205020404" charset="0"/>
             </a:endParaRPr>
           </a:p>
         </p:txBody>
@@ -3409,14 +3409,14 @@
             </a:pPr>
             <a:r>
               <a:rPr lang="en-US">
-                <a:latin typeface="Arial Regular" panose="020B0704020202020204" charset="0"/>
-                <a:cs typeface="Arial Regular" panose="020B0704020202020204" charset="0"/>
+                <a:latin typeface="Courier New Regular" panose="02070609020205020404" charset="0"/>
+                <a:cs typeface="Courier New Regular" panose="02070609020205020404" charset="0"/>
               </a:rPr>
               <a:t>[LYRICS AND CHORDS]</a:t>
             </a:r>
             <a:endParaRPr lang="en-US">
-              <a:latin typeface="Arial Regular" panose="020B0704020202020204" charset="0"/>
-              <a:cs typeface="Arial Regular" panose="020B0704020202020204" charset="0"/>
+              <a:latin typeface="Courier New Regular" panose="02070609020205020404" charset="0"/>
+              <a:cs typeface="Courier New Regular" panose="02070609020205020404" charset="0"/>
             </a:endParaRPr>
           </a:p>
         </p:txBody>
@@ -3445,8 +3445,8 @@
                 <a:solidFill>
                   <a:schemeClr val="tx2"/>
                 </a:solidFill>
-                <a:latin typeface="Arial Regular" panose="020B0704020202020204" charset="0"/>
-                <a:cs typeface="Arial Regular" panose="020B0704020202020204" charset="0"/>
+                <a:latin typeface="Courier New Regular" panose="02070609020205020404" charset="0"/>
+                <a:cs typeface="Courier New Regular" panose="02070609020205020404" charset="0"/>
               </a:rPr>
               <a:t>[Copyright Info]</a:t>
             </a:r>
@@ -3454,8 +3454,8 @@
               <a:solidFill>
                 <a:schemeClr val="tx2"/>
               </a:solidFill>
-              <a:latin typeface="Arial Regular" panose="020B0704020202020204" charset="0"/>
-              <a:cs typeface="Arial Regular" panose="020B0704020202020204" charset="0"/>
+              <a:latin typeface="Courier New Regular" panose="02070609020205020404" charset="0"/>
+              <a:cs typeface="Courier New Regular" panose="02070609020205020404" charset="0"/>
             </a:endParaRPr>
           </a:p>
         </p:txBody>

--- a/Song Template 1.pptx
+++ b/Song Template 1.pptx
@@ -3372,15 +3372,15 @@
           <a:p>
             <a:pPr algn="ctr"/>
             <a:r>
-              <a:rPr lang="en-US" sz="3600" b="1">
-                <a:latin typeface="Courier New Bold" panose="02070609020205020404" charset="0"/>
-                <a:cs typeface="Courier New Bold" panose="02070609020205020404" charset="0"/>
+              <a:rPr lang="en-US" sz="4000" b="1">
+                <a:latin typeface="Times New Roman Bold" panose="02020603050405020304" charset="0"/>
+                <a:cs typeface="Times New Roman Bold" panose="02020603050405020304" charset="0"/>
               </a:rPr>
               <a:t>[ TITLE ]</a:t>
             </a:r>
-            <a:endParaRPr lang="en-US" sz="3600" b="1">
-              <a:latin typeface="Courier New Bold" panose="02070609020205020404" charset="0"/>
-              <a:cs typeface="Courier New Bold" panose="02070609020205020404" charset="0"/>
+            <a:endParaRPr lang="en-US" sz="4000" b="1">
+              <a:latin typeface="Times New Roman Bold" panose="02020603050405020304" charset="0"/>
+              <a:cs typeface="Times New Roman Bold" panose="02020603050405020304" charset="0"/>
             </a:endParaRPr>
           </a:p>
         </p:txBody>
@@ -3409,14 +3409,14 @@
             </a:pPr>
             <a:r>
               <a:rPr lang="en-US">
-                <a:latin typeface="Courier New Regular" panose="02070609020205020404" charset="0"/>
-                <a:cs typeface="Courier New Regular" panose="02070609020205020404" charset="0"/>
+                <a:latin typeface="Times New Roman Regular" panose="02020603050405020304" charset="0"/>
+                <a:cs typeface="Times New Roman Regular" panose="02020603050405020304" charset="0"/>
               </a:rPr>
               <a:t>[LYRICS AND CHORDS]</a:t>
             </a:r>
             <a:endParaRPr lang="en-US">
-              <a:latin typeface="Courier New Regular" panose="02070609020205020404" charset="0"/>
-              <a:cs typeface="Courier New Regular" panose="02070609020205020404" charset="0"/>
+              <a:latin typeface="Times New Roman Regular" panose="02020603050405020304" charset="0"/>
+              <a:cs typeface="Times New Roman Regular" panose="02020603050405020304" charset="0"/>
             </a:endParaRPr>
           </a:p>
         </p:txBody>
@@ -3445,8 +3445,8 @@
                 <a:solidFill>
                   <a:schemeClr val="tx2"/>
                 </a:solidFill>
-                <a:latin typeface="Courier New Regular" panose="02070609020205020404" charset="0"/>
-                <a:cs typeface="Courier New Regular" panose="02070609020205020404" charset="0"/>
+                <a:latin typeface="Times New Roman Regular" panose="02020603050405020304" charset="0"/>
+                <a:cs typeface="Times New Roman Regular" panose="02020603050405020304" charset="0"/>
               </a:rPr>
               <a:t>[Copyright Info]</a:t>
             </a:r>
@@ -3454,8 +3454,8 @@
               <a:solidFill>
                 <a:schemeClr val="tx2"/>
               </a:solidFill>
-              <a:latin typeface="Courier New Regular" panose="02070609020205020404" charset="0"/>
-              <a:cs typeface="Courier New Regular" panose="02070609020205020404" charset="0"/>
+              <a:latin typeface="Times New Roman Regular" panose="02020603050405020304" charset="0"/>
+              <a:cs typeface="Times New Roman Regular" panose="02020603050405020304" charset="0"/>
             </a:endParaRPr>
           </a:p>
         </p:txBody>

--- a/Song Template 1.pptx
+++ b/Song Template 1.pptx
@@ -115,7 +115,7 @@
             <a:srgbClr val="A4A3A4"/>
           </p15:clr>
         </p15:guide>
-        <p15:guide id="2" pos="3842" userDrawn="1">
+        <p15:guide id="2" pos="3840" userDrawn="1">
           <p15:clr>
             <a:srgbClr val="A4A3A4"/>
           </p15:clr>
@@ -2792,9 +2792,15 @@
 <p:sldMaster xmlns:a="http://schemas.openxmlformats.org/drawingml/2006/main" xmlns:r="http://schemas.openxmlformats.org/officeDocument/2006/relationships" xmlns:p="http://schemas.openxmlformats.org/presentationml/2006/main">
   <p:cSld>
     <p:bg>
-      <p:bgRef idx="1001">
-        <a:schemeClr val="bg1"/>
-      </p:bgRef>
+      <p:bgPr>
+        <a:blipFill rotWithShape="1">
+          <a:blip r:embed="rId12"/>
+          <a:stretch>
+            <a:fillRect/>
+          </a:stretch>
+        </a:blipFill>
+        <a:effectLst/>
+      </p:bgPr>
     </p:bg>
     <p:spTree>
       <p:nvGrpSpPr>
@@ -2822,8 +2828,8 @@
         </p:nvSpPr>
         <p:spPr>
           <a:xfrm>
-            <a:off x="838200" y="365125"/>
-            <a:ext cx="10515600" cy="1325563"/>
+            <a:off x="0" y="-10160"/>
+            <a:ext cx="12192635" cy="858520"/>
           </a:xfrm>
           <a:prstGeom prst="rect">
             <a:avLst/>
@@ -2978,6 +2984,8 @@
                     <a:tint val="75000"/>
                   </a:schemeClr>
                 </a:solidFill>
+                <a:latin typeface="Times New Roman Regular" panose="02020603050405020304" charset="0"/>
+                <a:cs typeface="Times New Roman Regular" panose="02020603050405020304" charset="0"/>
               </a:defRPr>
             </a:lvl1pPr>
           </a:lstStyle>
@@ -3049,7 +3057,7 @@
   <p:hf sldNum="0" hdr="0" dt="0"/>
   <p:txStyles>
     <p:titleStyle>
-      <a:lvl1pPr algn="l" defTabSz="914400" rtl="0" eaLnBrk="1" latinLnBrk="0" hangingPunct="1">
+      <a:lvl1pPr algn="ctr" defTabSz="914400" rtl="0" eaLnBrk="1" latinLnBrk="0" hangingPunct="1">
         <a:lnSpc>
           <a:spcPct val="90000"/>
         </a:lnSpc>
@@ -3061,14 +3069,14 @@
           <a:solidFill>
             <a:schemeClr val="tx1"/>
           </a:solidFill>
-          <a:latin typeface="+mj-lt"/>
+          <a:latin typeface="Times New Roman Regular" panose="02020603050405020304" charset="0"/>
           <a:ea typeface="+mj-ea"/>
-          <a:cs typeface="+mj-cs"/>
+          <a:cs typeface="Times New Roman Regular" panose="02020603050405020304" charset="0"/>
         </a:defRPr>
       </a:lvl1pPr>
     </p:titleStyle>
     <p:bodyStyle>
-      <a:lvl1pPr marL="228600" indent="-228600" algn="l" defTabSz="914400" rtl="0" eaLnBrk="1" latinLnBrk="0" hangingPunct="1">
+      <a:lvl1pPr marL="0" indent="0" algn="ctr" defTabSz="914400" rtl="0" eaLnBrk="1" latinLnBrk="0" hangingPunct="1">
         <a:lnSpc>
           <a:spcPct val="90000"/>
         </a:lnSpc>
@@ -3076,17 +3084,17 @@
           <a:spcPts val="1000"/>
         </a:spcBef>
         <a:buFont typeface="Arial" panose="020B0704020202020204" pitchFamily="34" charset="0"/>
-        <a:buChar char="•"/>
+        <a:buNone/>
         <a:defRPr sz="2800" kern="1200">
           <a:solidFill>
             <a:schemeClr val="tx1"/>
           </a:solidFill>
-          <a:latin typeface="+mn-lt"/>
+          <a:latin typeface="Times New Roman Regular" panose="02020603050405020304" charset="0"/>
           <a:ea typeface="+mn-ea"/>
-          <a:cs typeface="+mn-cs"/>
+          <a:cs typeface="Times New Roman Regular" panose="02020603050405020304" charset="0"/>
         </a:defRPr>
       </a:lvl1pPr>
-      <a:lvl2pPr marL="685800" indent="-228600" algn="l" defTabSz="914400" rtl="0" eaLnBrk="1" latinLnBrk="0" hangingPunct="1">
+      <a:lvl2pPr marL="457200" indent="0" algn="ctr" defTabSz="914400" rtl="0" eaLnBrk="1" latinLnBrk="0" hangingPunct="1">
         <a:lnSpc>
           <a:spcPct val="90000"/>
         </a:lnSpc>
@@ -3094,17 +3102,17 @@
           <a:spcPts val="500"/>
         </a:spcBef>
         <a:buFont typeface="Arial" panose="020B0704020202020204" pitchFamily="34" charset="0"/>
-        <a:buChar char="•"/>
+        <a:buNone/>
         <a:defRPr sz="2400" kern="1200">
           <a:solidFill>
             <a:schemeClr val="tx1"/>
           </a:solidFill>
-          <a:latin typeface="+mn-lt"/>
+          <a:latin typeface="Times New Roman Regular" panose="02020603050405020304" charset="0"/>
           <a:ea typeface="+mn-ea"/>
-          <a:cs typeface="+mn-cs"/>
+          <a:cs typeface="Times New Roman Regular" panose="02020603050405020304" charset="0"/>
         </a:defRPr>
       </a:lvl2pPr>
-      <a:lvl3pPr marL="1143000" indent="-228600" algn="l" defTabSz="914400" rtl="0" eaLnBrk="1" latinLnBrk="0" hangingPunct="1">
+      <a:lvl3pPr marL="914400" indent="0" algn="ctr" defTabSz="914400" rtl="0" eaLnBrk="1" latinLnBrk="0" hangingPunct="1">
         <a:lnSpc>
           <a:spcPct val="90000"/>
         </a:lnSpc>
@@ -3112,17 +3120,17 @@
           <a:spcPts val="500"/>
         </a:spcBef>
         <a:buFont typeface="Arial" panose="020B0704020202020204" pitchFamily="34" charset="0"/>
-        <a:buChar char="•"/>
+        <a:buNone/>
         <a:defRPr sz="2000" kern="1200">
           <a:solidFill>
             <a:schemeClr val="tx1"/>
           </a:solidFill>
-          <a:latin typeface="+mn-lt"/>
+          <a:latin typeface="Times New Roman Regular" panose="02020603050405020304" charset="0"/>
           <a:ea typeface="+mn-ea"/>
-          <a:cs typeface="+mn-cs"/>
+          <a:cs typeface="Times New Roman Regular" panose="02020603050405020304" charset="0"/>
         </a:defRPr>
       </a:lvl3pPr>
-      <a:lvl4pPr marL="1600200" indent="-228600" algn="l" defTabSz="914400" rtl="0" eaLnBrk="1" latinLnBrk="0" hangingPunct="1">
+      <a:lvl4pPr marL="1371600" indent="0" algn="ctr" defTabSz="914400" rtl="0" eaLnBrk="1" latinLnBrk="0" hangingPunct="1">
         <a:lnSpc>
           <a:spcPct val="90000"/>
         </a:lnSpc>
@@ -3130,17 +3138,17 @@
           <a:spcPts val="500"/>
         </a:spcBef>
         <a:buFont typeface="Arial" panose="020B0704020202020204" pitchFamily="34" charset="0"/>
-        <a:buChar char="•"/>
+        <a:buNone/>
         <a:defRPr sz="1800" kern="1200">
           <a:solidFill>
             <a:schemeClr val="tx1"/>
           </a:solidFill>
-          <a:latin typeface="+mn-lt"/>
+          <a:latin typeface="Times New Roman Regular" panose="02020603050405020304" charset="0"/>
           <a:ea typeface="+mn-ea"/>
-          <a:cs typeface="+mn-cs"/>
+          <a:cs typeface="Times New Roman Regular" panose="02020603050405020304" charset="0"/>
         </a:defRPr>
       </a:lvl4pPr>
-      <a:lvl5pPr marL="2057400" indent="-228600" algn="l" defTabSz="914400" rtl="0" eaLnBrk="1" latinLnBrk="0" hangingPunct="1">
+      <a:lvl5pPr marL="1828800" indent="0" algn="ctr" defTabSz="914400" rtl="0" eaLnBrk="1" latinLnBrk="0" hangingPunct="1">
         <a:lnSpc>
           <a:spcPct val="90000"/>
         </a:lnSpc>
@@ -3148,14 +3156,14 @@
           <a:spcPts val="500"/>
         </a:spcBef>
         <a:buFont typeface="Arial" panose="020B0704020202020204" pitchFamily="34" charset="0"/>
-        <a:buChar char="•"/>
+        <a:buNone/>
         <a:defRPr sz="1800" kern="1200">
           <a:solidFill>
             <a:schemeClr val="tx1"/>
           </a:solidFill>
-          <a:latin typeface="+mn-lt"/>
+          <a:latin typeface="Times New Roman Regular" panose="02020603050405020304" charset="0"/>
           <a:ea typeface="+mn-ea"/>
-          <a:cs typeface="+mn-cs"/>
+          <a:cs typeface="Times New Roman Regular" panose="02020603050405020304" charset="0"/>
         </a:defRPr>
       </a:lvl5pPr>
       <a:lvl6pPr marL="2514600" indent="-228600" algn="l" defTabSz="914400" rtl="0" eaLnBrk="1" latinLnBrk="0" hangingPunct="1">
@@ -3361,12 +3369,7 @@
             <p:ph type="title"/>
           </p:nvPr>
         </p:nvSpPr>
-        <p:spPr>
-          <a:xfrm>
-            <a:off x="0" y="0"/>
-            <a:ext cx="12191365" cy="897890"/>
-          </a:xfrm>
-        </p:spPr>
+        <p:spPr/>
         <p:txBody>
           <a:bodyPr/>
           <a:p>
@@ -3397,8 +3400,8 @@
         </p:nvSpPr>
         <p:spPr>
           <a:xfrm>
-            <a:off x="0" y="1620520"/>
-            <a:ext cx="12191365" cy="4218940"/>
+            <a:off x="838200" y="1620520"/>
+            <a:ext cx="10515600" cy="4248150"/>
           </a:xfrm>
         </p:spPr>
         <p:txBody>
@@ -3431,12 +3434,7 @@
             <p:ph type="ftr" sz="quarter" idx="11"/>
           </p:nvPr>
         </p:nvSpPr>
-        <p:spPr>
-          <a:xfrm>
-            <a:off x="-635" y="6356350"/>
-            <a:ext cx="12191365" cy="365125"/>
-          </a:xfrm>
-        </p:spPr>
+        <p:spPr/>
         <p:txBody>
           <a:bodyPr/>
           <a:p>

--- a/Song Template 1.pptx
+++ b/Song Template 1.pptx
@@ -471,6 +471,58 @@
     </a:lvl9pPr>
   </p:notesStyle>
 </p:notesMaster>
+</file>
+
+<file path=ppt/notesSlides/notesSlide1.xml><?xml version="1.0" encoding="utf-8"?>
+<p:notes xmlns:a="http://schemas.openxmlformats.org/drawingml/2006/main" xmlns:r="http://schemas.openxmlformats.org/officeDocument/2006/relationships" xmlns:p="http://schemas.openxmlformats.org/presentationml/2006/main">
+  <p:cSld>
+    <p:spTree>
+      <p:nvGrpSpPr>
+        <p:cNvPr id="1" name=""/>
+        <p:cNvGrpSpPr/>
+        <p:nvPr/>
+      </p:nvGrpSpPr>
+      <p:grpSpPr/>
+      <p:sp>
+        <p:nvSpPr>
+          <p:cNvPr id="2" name="Slide Image Placeholder 1"/>
+          <p:cNvSpPr>
+            <a:spLocks noGrp="1"/>
+          </p:cNvSpPr>
+          <p:nvPr>
+            <p:ph type="sldImg" idx="2"/>
+          </p:nvPr>
+        </p:nvSpPr>
+        <p:spPr/>
+      </p:sp>
+      <p:sp>
+        <p:nvSpPr>
+          <p:cNvPr id="3" name="Text Placeholder 2"/>
+          <p:cNvSpPr>
+            <a:spLocks noGrp="1"/>
+          </p:cNvSpPr>
+          <p:nvPr>
+            <p:ph type="body" idx="3"/>
+          </p:nvPr>
+        </p:nvSpPr>
+        <p:spPr/>
+        <p:txBody>
+          <a:bodyPr/>
+          <a:p>
+            <a:r>
+              <a:rPr lang="en-US"/>
+              <a:t>[Presenter Note]</a:t>
+            </a:r>
+            <a:endParaRPr lang="en-US"/>
+          </a:p>
+        </p:txBody>
+      </p:sp>
+    </p:spTree>
+  </p:cSld>
+  <p:clrMapOvr>
+    <a:masterClrMapping/>
+  </p:clrMapOvr>
+</p:notes>
 </file>
 
 <file path=ppt/slideLayouts/slideLayout1.xml><?xml version="1.0" encoding="utf-8"?>

--- a/Song Template 1.pptx
+++ b/Song Template 1.pptx
@@ -3442,42 +3442,6 @@
       </p:sp>
       <p:sp>
         <p:nvSpPr>
-          <p:cNvPr id="4" name="Content Placeholder 3"/>
-          <p:cNvSpPr>
-            <a:spLocks noGrp="1"/>
-          </p:cNvSpPr>
-          <p:nvPr>
-            <p:ph idx="1"/>
-          </p:nvPr>
-        </p:nvSpPr>
-        <p:spPr>
-          <a:xfrm>
-            <a:off x="838200" y="1620520"/>
-            <a:ext cx="10515600" cy="4248150"/>
-          </a:xfrm>
-        </p:spPr>
-        <p:txBody>
-          <a:bodyPr anchor="ctr" anchorCtr="0"/>
-          <a:p>
-            <a:pPr marL="0" indent="0" algn="ctr">
-              <a:buNone/>
-            </a:pPr>
-            <a:r>
-              <a:rPr lang="en-US">
-                <a:latin typeface="Times New Roman Regular" panose="02020603050405020304" charset="0"/>
-                <a:cs typeface="Times New Roman Regular" panose="02020603050405020304" charset="0"/>
-              </a:rPr>
-              <a:t>[LYRICS AND CHORDS]</a:t>
-            </a:r>
-            <a:endParaRPr lang="en-US">
-              <a:latin typeface="Times New Roman Regular" panose="02020603050405020304" charset="0"/>
-              <a:cs typeface="Times New Roman Regular" panose="02020603050405020304" charset="0"/>
-            </a:endParaRPr>
-          </a:p>
-        </p:txBody>
-      </p:sp>
-      <p:sp>
-        <p:nvSpPr>
           <p:cNvPr id="5" name="Footer Placeholder 4"/>
           <p:cNvSpPr>
             <a:spLocks noGrp="1"/>
@@ -3510,6 +3474,320 @@
           </a:p>
         </p:txBody>
       </p:sp>
+      <p:graphicFrame>
+        <p:nvGraphicFramePr>
+          <p:cNvPr id="1025" name="LyricsTable"/>
+          <p:cNvGraphicFramePr/>
+          <p:nvPr/>
+        </p:nvGraphicFramePr>
+        <p:xfrm>
+          <a:off x="0" y="1790700"/>
+          <a:ext cx="12192000" cy="4050030"/>
+        </p:xfrm>
+        <a:graphic>
+          <a:graphicData uri="http://schemas.openxmlformats.org/drawingml/2006/table">
+            <a:tbl>
+              <a:tblPr>
+                <a:tableStyleId>{5C22544A-7EE6-4342-B051-7303C2061113}</a:tableStyleId>
+              </a:tblPr>
+              <a:tblGrid>
+                <a:gridCol w="12192000"/>
+              </a:tblGrid>
+              <a:tr h="450000">
+                <a:tc>
+                  <a:txBody>
+                    <a:bodyPr/>
+                    <a:p>
+                      <a:pPr algn="ctr">
+                        <a:buNone/>
+                      </a:pPr>
+                      <a:r>
+                        <a:rPr lang="en-US" sz="2400">
+                          <a:latin typeface="Times New Roman Regular" panose="02020603050405020304"/>
+                          <a:cs typeface="Times New Roman Regular" panose="02020603050405020304"/>
+                        </a:rPr>
+                        <a:t>[LYRICS AND CHORDS]</a:t>
+                      </a:r>
+                      <a:endParaRPr lang="en-US" sz="2400">
+                        <a:latin typeface="Times New Roman Regular" panose="02020603050405020304"/>
+                        <a:cs typeface="Times New Roman Regular" panose="02020603050405020304"/>
+                      </a:endParaRPr>
+                    </a:p>
+                  </a:txBody>
+                  <a:tcPr marL="0" marR="0" marT="0" marB="0" vert="horz" anchor="ctr">
+                    <a:lnL w="0">
+                      <a:noFill/>
+                    </a:lnL>
+                    <a:lnR w="0">
+                      <a:noFill/>
+                    </a:lnR>
+                    <a:lnT w="0">
+                      <a:noFill/>
+                    </a:lnT>
+                    <a:lnB w="0">
+                      <a:noFill/>
+                    </a:lnB>
+                  </a:tcPr>
+                </a:tc>
+              </a:tr>
+              <a:tr h="450000">
+                <a:tc>
+                  <a:txBody>
+                    <a:bodyPr/>
+                    <a:p>
+                      <a:pPr algn="ctr">
+                        <a:buNone/>
+                      </a:pPr>
+                      <a:r>
+                        <a:rPr lang="en-US" sz="2040">
+                          <a:latin typeface="Courier New" panose="02070609020205020404"/>
+                          <a:cs typeface="Courier New" panose="02070609020205020404"/>
+                        </a:rPr>
+                        <a:t>                  </a:t>
+                      </a:r>
+                      <a:endParaRPr lang="en-US" sz="2040">
+                        <a:latin typeface="Courier New" panose="02070609020205020404"/>
+                        <a:cs typeface="Courier New" panose="02070609020205020404"/>
+                      </a:endParaRPr>
+                    </a:p>
+                  </a:txBody>
+                  <a:tcPr marL="0" marR="0" marT="0" marB="0" vert="horz" anchor="ctr">
+                    <a:lnL w="0">
+                      <a:noFill/>
+                    </a:lnL>
+                    <a:lnR w="0">
+                      <a:noFill/>
+                    </a:lnR>
+                    <a:lnT w="0">
+                      <a:noFill/>
+                    </a:lnT>
+                    <a:lnB w="0">
+                      <a:noFill/>
+                    </a:lnB>
+                  </a:tcPr>
+                </a:tc>
+              </a:tr>
+              <a:tr h="450000">
+                <a:tc>
+                  <a:txBody>
+                    <a:bodyPr/>
+                    <a:p>
+                      <a:pPr algn="ctr">
+                        <a:buNone/>
+                      </a:pPr>
+                      <a:endParaRPr lang="en-US" sz="2400">
+                        <a:latin typeface="Times New Roman Regular" panose="02020603050405020304"/>
+                        <a:cs typeface="Times New Roman Regular" panose="02020603050405020304"/>
+                      </a:endParaRPr>
+                    </a:p>
+                  </a:txBody>
+                  <a:tcPr marL="0" marR="0" marT="0" marB="0" vert="horz" anchor="ctr">
+                    <a:lnL w="0">
+                      <a:noFill/>
+                    </a:lnL>
+                    <a:lnR w="0">
+                      <a:noFill/>
+                    </a:lnR>
+                    <a:lnT w="0">
+                      <a:noFill/>
+                    </a:lnT>
+                    <a:lnB w="0">
+                      <a:noFill/>
+                    </a:lnB>
+                  </a:tcPr>
+                </a:tc>
+              </a:tr>
+              <a:tr h="450000">
+                <a:tc>
+                  <a:txBody>
+                    <a:bodyPr/>
+                    <a:p>
+                      <a:pPr algn="ctr">
+                        <a:buNone/>
+                      </a:pPr>
+                      <a:endParaRPr lang="en-US" sz="2040">
+                        <a:latin typeface="Courier New" panose="02070609020205020404"/>
+                        <a:cs typeface="Courier New" panose="02070609020205020404"/>
+                      </a:endParaRPr>
+                    </a:p>
+                  </a:txBody>
+                  <a:tcPr marL="0" marR="0" marT="0" marB="0" vert="horz" anchor="ctr">
+                    <a:lnL w="0">
+                      <a:noFill/>
+                    </a:lnL>
+                    <a:lnR w="0">
+                      <a:noFill/>
+                    </a:lnR>
+                    <a:lnT w="0">
+                      <a:noFill/>
+                    </a:lnT>
+                    <a:lnB w="0">
+                      <a:noFill/>
+                    </a:lnB>
+                  </a:tcPr>
+                </a:tc>
+              </a:tr>
+              <a:tr h="450000">
+                <a:tc>
+                  <a:txBody>
+                    <a:bodyPr/>
+                    <a:p>
+                      <a:pPr algn="ctr">
+                        <a:buNone/>
+                      </a:pPr>
+                      <a:r>
+                        <a:rPr lang="en-US" sz="2400">
+                          <a:latin typeface="Times New Roman Regular" panose="02020603050405020304"/>
+                          <a:cs typeface="Times New Roman Regular" panose="02020603050405020304"/>
+                        </a:rPr>
+                        <a:t> </a:t>
+                      </a:r>
+                      <a:endParaRPr lang="en-US" sz="2400">
+                        <a:latin typeface="Times New Roman Regular" panose="02020603050405020304"/>
+                        <a:cs typeface="Times New Roman Regular" panose="02020603050405020304"/>
+                      </a:endParaRPr>
+                    </a:p>
+                  </a:txBody>
+                  <a:tcPr marL="0" marR="0" marT="0" marB="0" vert="horz" anchor="ctr">
+                    <a:lnL w="0">
+                      <a:noFill/>
+                    </a:lnL>
+                    <a:lnR w="0">
+                      <a:noFill/>
+                    </a:lnR>
+                    <a:lnT w="0">
+                      <a:noFill/>
+                    </a:lnT>
+                    <a:lnB w="0">
+                      <a:noFill/>
+                    </a:lnB>
+                  </a:tcPr>
+                </a:tc>
+              </a:tr>
+              <a:tr h="450000">
+                <a:tc>
+                  <a:txBody>
+                    <a:bodyPr/>
+                    <a:p>
+                      <a:pPr algn="ctr">
+                        <a:buNone/>
+                      </a:pPr>
+                      <a:endParaRPr lang="en-US" sz="2040">
+                        <a:latin typeface="Courier New" panose="02070609020205020404"/>
+                        <a:cs typeface="Courier New" panose="02070609020205020404"/>
+                      </a:endParaRPr>
+                    </a:p>
+                  </a:txBody>
+                  <a:tcPr marL="0" marR="0" marT="0" marB="0" vert="horz" anchor="ctr">
+                    <a:lnL w="0">
+                      <a:noFill/>
+                    </a:lnL>
+                    <a:lnR w="0">
+                      <a:noFill/>
+                    </a:lnR>
+                    <a:lnT w="0">
+                      <a:noFill/>
+                    </a:lnT>
+                    <a:lnB w="0">
+                      <a:noFill/>
+                    </a:lnB>
+                  </a:tcPr>
+                </a:tc>
+              </a:tr>
+              <a:tr h="450000">
+                <a:tc>
+                  <a:txBody>
+                    <a:bodyPr/>
+                    <a:p>
+                      <a:pPr algn="ctr">
+                        <a:buNone/>
+                      </a:pPr>
+                      <a:endParaRPr lang="en-US" sz="2400">
+                        <a:latin typeface="Times New Roman Regular" panose="02020603050405020304"/>
+                        <a:cs typeface="Times New Roman Regular" panose="02020603050405020304"/>
+                      </a:endParaRPr>
+                    </a:p>
+                  </a:txBody>
+                  <a:tcPr marL="0" marR="0" marT="0" marB="0" vert="horz" anchor="ctr">
+                    <a:lnL w="0">
+                      <a:noFill/>
+                    </a:lnL>
+                    <a:lnR w="0">
+                      <a:noFill/>
+                    </a:lnR>
+                    <a:lnT w="0">
+                      <a:noFill/>
+                    </a:lnT>
+                    <a:lnB w="0">
+                      <a:noFill/>
+                    </a:lnB>
+                  </a:tcPr>
+                </a:tc>
+              </a:tr>
+              <a:tr h="450000">
+                <a:tc>
+                  <a:txBody>
+                    <a:bodyPr/>
+                    <a:p>
+                      <a:pPr algn="l">
+                        <a:buNone/>
+                      </a:pPr>
+                      <a:endParaRPr lang="en-US" sz="2400">
+                        <a:latin typeface="Courier New Regular" panose="02070609020205020404" charset="0"/>
+                        <a:cs typeface="Courier New Regular" panose="02070609020205020404" charset="0"/>
+                      </a:endParaRPr>
+                    </a:p>
+                  </a:txBody>
+                  <a:tcPr marL="0" marR="0" marT="0" marB="0" vert="horz" anchor="ctr">
+                    <a:lnL w="0">
+                      <a:noFill/>
+                    </a:lnL>
+                    <a:lnR w="0">
+                      <a:noFill/>
+                    </a:lnR>
+                    <a:lnT w="0">
+                      <a:noFill/>
+                    </a:lnT>
+                    <a:lnB w="0">
+                      <a:noFill/>
+                    </a:lnB>
+                  </a:tcPr>
+                </a:tc>
+              </a:tr>
+              <a:tr h="450000">
+                <a:tc>
+                  <a:txBody>
+                    <a:bodyPr/>
+                    <a:p>
+                      <a:pPr algn="ctr">
+                        <a:buNone/>
+                      </a:pPr>
+                      <a:endParaRPr lang="en-US" sz="2400">
+                        <a:latin typeface="Times New Roman Regular" panose="02020603050405020304" charset="0"/>
+                        <a:cs typeface="Times New Roman Regular" panose="02020603050405020304" charset="0"/>
+                      </a:endParaRPr>
+                    </a:p>
+                  </a:txBody>
+                  <a:tcPr marL="0" marR="0" marT="0" marB="0" vert="horz" anchor="ctr">
+                    <a:lnL w="0">
+                      <a:noFill/>
+                    </a:lnL>
+                    <a:lnR w="0">
+                      <a:noFill/>
+                    </a:lnR>
+                    <a:lnT w="0">
+                      <a:noFill/>
+                    </a:lnT>
+                    <a:lnB w="0">
+                      <a:noFill/>
+                    </a:lnB>
+                  </a:tcPr>
+                </a:tc>
+              </a:tr>
+            </a:tbl>
+          </a:graphicData>
+        </a:graphic>
+      </p:graphicFrame>
     </p:spTree>
   </p:cSld>
   <p:clrMapOvr>

--- a/Song Template 1.pptx
+++ b/Song Template 1.pptx
@@ -3442,6 +3442,33 @@
       </p:sp>
       <p:sp>
         <p:nvSpPr>
+          <p:cNvPr id="2" name="Content Placeholder 1"/>
+          <p:cNvSpPr>
+            <a:spLocks noGrp="1"/>
+          </p:cNvSpPr>
+          <p:nvPr>
+            <p:ph idx="1"/>
+          </p:nvPr>
+        </p:nvSpPr>
+        <p:spPr/>
+        <p:txBody>
+          <a:bodyPr/>
+          <a:p>
+            <a:pPr marL="0" indent="0" algn="ctr">
+              <a:buNone/>
+            </a:pPr>
+            <a:r>
+              <a:rPr lang="en-US" dirty="0">
+                <a:sym typeface="+mn-ea"/>
+              </a:rPr>
+              <a:t>[LYRICS AND CHORDS]</a:t>
+            </a:r>
+            <a:endParaRPr lang="en-US"/>
+          </a:p>
+        </p:txBody>
+      </p:sp>
+      <p:sp>
+        <p:nvSpPr>
           <p:cNvPr id="5" name="Footer Placeholder 4"/>
           <p:cNvSpPr>
             <a:spLocks noGrp="1"/>
@@ -3474,320 +3501,6 @@
           </a:p>
         </p:txBody>
       </p:sp>
-      <p:graphicFrame>
-        <p:nvGraphicFramePr>
-          <p:cNvPr id="1025" name="LyricsTable"/>
-          <p:cNvGraphicFramePr/>
-          <p:nvPr/>
-        </p:nvGraphicFramePr>
-        <p:xfrm>
-          <a:off x="0" y="1790700"/>
-          <a:ext cx="12192000" cy="4050030"/>
-        </p:xfrm>
-        <a:graphic>
-          <a:graphicData uri="http://schemas.openxmlformats.org/drawingml/2006/table">
-            <a:tbl>
-              <a:tblPr>
-                <a:tableStyleId>{5C22544A-7EE6-4342-B051-7303C2061113}</a:tableStyleId>
-              </a:tblPr>
-              <a:tblGrid>
-                <a:gridCol w="12192000"/>
-              </a:tblGrid>
-              <a:tr h="450000">
-                <a:tc>
-                  <a:txBody>
-                    <a:bodyPr/>
-                    <a:p>
-                      <a:pPr algn="ctr">
-                        <a:buNone/>
-                      </a:pPr>
-                      <a:r>
-                        <a:rPr lang="en-US" sz="2400">
-                          <a:latin typeface="Times New Roman Regular" panose="02020603050405020304"/>
-                          <a:cs typeface="Times New Roman Regular" panose="02020603050405020304"/>
-                        </a:rPr>
-                        <a:t>[LYRICS AND CHORDS]</a:t>
-                      </a:r>
-                      <a:endParaRPr lang="en-US" sz="2400">
-                        <a:latin typeface="Times New Roman Regular" panose="02020603050405020304"/>
-                        <a:cs typeface="Times New Roman Regular" panose="02020603050405020304"/>
-                      </a:endParaRPr>
-                    </a:p>
-                  </a:txBody>
-                  <a:tcPr marL="0" marR="0" marT="0" marB="0" vert="horz" anchor="ctr">
-                    <a:lnL w="0">
-                      <a:noFill/>
-                    </a:lnL>
-                    <a:lnR w="0">
-                      <a:noFill/>
-                    </a:lnR>
-                    <a:lnT w="0">
-                      <a:noFill/>
-                    </a:lnT>
-                    <a:lnB w="0">
-                      <a:noFill/>
-                    </a:lnB>
-                  </a:tcPr>
-                </a:tc>
-              </a:tr>
-              <a:tr h="450000">
-                <a:tc>
-                  <a:txBody>
-                    <a:bodyPr/>
-                    <a:p>
-                      <a:pPr algn="ctr">
-                        <a:buNone/>
-                      </a:pPr>
-                      <a:r>
-                        <a:rPr lang="en-US" sz="2040">
-                          <a:latin typeface="Courier New" panose="02070609020205020404"/>
-                          <a:cs typeface="Courier New" panose="02070609020205020404"/>
-                        </a:rPr>
-                        <a:t>                  </a:t>
-                      </a:r>
-                      <a:endParaRPr lang="en-US" sz="2040">
-                        <a:latin typeface="Courier New" panose="02070609020205020404"/>
-                        <a:cs typeface="Courier New" panose="02070609020205020404"/>
-                      </a:endParaRPr>
-                    </a:p>
-                  </a:txBody>
-                  <a:tcPr marL="0" marR="0" marT="0" marB="0" vert="horz" anchor="ctr">
-                    <a:lnL w="0">
-                      <a:noFill/>
-                    </a:lnL>
-                    <a:lnR w="0">
-                      <a:noFill/>
-                    </a:lnR>
-                    <a:lnT w="0">
-                      <a:noFill/>
-                    </a:lnT>
-                    <a:lnB w="0">
-                      <a:noFill/>
-                    </a:lnB>
-                  </a:tcPr>
-                </a:tc>
-              </a:tr>
-              <a:tr h="450000">
-                <a:tc>
-                  <a:txBody>
-                    <a:bodyPr/>
-                    <a:p>
-                      <a:pPr algn="ctr">
-                        <a:buNone/>
-                      </a:pPr>
-                      <a:endParaRPr lang="en-US" sz="2400">
-                        <a:latin typeface="Times New Roman Regular" panose="02020603050405020304"/>
-                        <a:cs typeface="Times New Roman Regular" panose="02020603050405020304"/>
-                      </a:endParaRPr>
-                    </a:p>
-                  </a:txBody>
-                  <a:tcPr marL="0" marR="0" marT="0" marB="0" vert="horz" anchor="ctr">
-                    <a:lnL w="0">
-                      <a:noFill/>
-                    </a:lnL>
-                    <a:lnR w="0">
-                      <a:noFill/>
-                    </a:lnR>
-                    <a:lnT w="0">
-                      <a:noFill/>
-                    </a:lnT>
-                    <a:lnB w="0">
-                      <a:noFill/>
-                    </a:lnB>
-                  </a:tcPr>
-                </a:tc>
-              </a:tr>
-              <a:tr h="450000">
-                <a:tc>
-                  <a:txBody>
-                    <a:bodyPr/>
-                    <a:p>
-                      <a:pPr algn="ctr">
-                        <a:buNone/>
-                      </a:pPr>
-                      <a:endParaRPr lang="en-US" sz="2040">
-                        <a:latin typeface="Courier New" panose="02070609020205020404"/>
-                        <a:cs typeface="Courier New" panose="02070609020205020404"/>
-                      </a:endParaRPr>
-                    </a:p>
-                  </a:txBody>
-                  <a:tcPr marL="0" marR="0" marT="0" marB="0" vert="horz" anchor="ctr">
-                    <a:lnL w="0">
-                      <a:noFill/>
-                    </a:lnL>
-                    <a:lnR w="0">
-                      <a:noFill/>
-                    </a:lnR>
-                    <a:lnT w="0">
-                      <a:noFill/>
-                    </a:lnT>
-                    <a:lnB w="0">
-                      <a:noFill/>
-                    </a:lnB>
-                  </a:tcPr>
-                </a:tc>
-              </a:tr>
-              <a:tr h="450000">
-                <a:tc>
-                  <a:txBody>
-                    <a:bodyPr/>
-                    <a:p>
-                      <a:pPr algn="ctr">
-                        <a:buNone/>
-                      </a:pPr>
-                      <a:r>
-                        <a:rPr lang="en-US" sz="2400">
-                          <a:latin typeface="Times New Roman Regular" panose="02020603050405020304"/>
-                          <a:cs typeface="Times New Roman Regular" panose="02020603050405020304"/>
-                        </a:rPr>
-                        <a:t> </a:t>
-                      </a:r>
-                      <a:endParaRPr lang="en-US" sz="2400">
-                        <a:latin typeface="Times New Roman Regular" panose="02020603050405020304"/>
-                        <a:cs typeface="Times New Roman Regular" panose="02020603050405020304"/>
-                      </a:endParaRPr>
-                    </a:p>
-                  </a:txBody>
-                  <a:tcPr marL="0" marR="0" marT="0" marB="0" vert="horz" anchor="ctr">
-                    <a:lnL w="0">
-                      <a:noFill/>
-                    </a:lnL>
-                    <a:lnR w="0">
-                      <a:noFill/>
-                    </a:lnR>
-                    <a:lnT w="0">
-                      <a:noFill/>
-                    </a:lnT>
-                    <a:lnB w="0">
-                      <a:noFill/>
-                    </a:lnB>
-                  </a:tcPr>
-                </a:tc>
-              </a:tr>
-              <a:tr h="450000">
-                <a:tc>
-                  <a:txBody>
-                    <a:bodyPr/>
-                    <a:p>
-                      <a:pPr algn="ctr">
-                        <a:buNone/>
-                      </a:pPr>
-                      <a:endParaRPr lang="en-US" sz="2040">
-                        <a:latin typeface="Courier New" panose="02070609020205020404"/>
-                        <a:cs typeface="Courier New" panose="02070609020205020404"/>
-                      </a:endParaRPr>
-                    </a:p>
-                  </a:txBody>
-                  <a:tcPr marL="0" marR="0" marT="0" marB="0" vert="horz" anchor="ctr">
-                    <a:lnL w="0">
-                      <a:noFill/>
-                    </a:lnL>
-                    <a:lnR w="0">
-                      <a:noFill/>
-                    </a:lnR>
-                    <a:lnT w="0">
-                      <a:noFill/>
-                    </a:lnT>
-                    <a:lnB w="0">
-                      <a:noFill/>
-                    </a:lnB>
-                  </a:tcPr>
-                </a:tc>
-              </a:tr>
-              <a:tr h="450000">
-                <a:tc>
-                  <a:txBody>
-                    <a:bodyPr/>
-                    <a:p>
-                      <a:pPr algn="ctr">
-                        <a:buNone/>
-                      </a:pPr>
-                      <a:endParaRPr lang="en-US" sz="2400">
-                        <a:latin typeface="Times New Roman Regular" panose="02020603050405020304"/>
-                        <a:cs typeface="Times New Roman Regular" panose="02020603050405020304"/>
-                      </a:endParaRPr>
-                    </a:p>
-                  </a:txBody>
-                  <a:tcPr marL="0" marR="0" marT="0" marB="0" vert="horz" anchor="ctr">
-                    <a:lnL w="0">
-                      <a:noFill/>
-                    </a:lnL>
-                    <a:lnR w="0">
-                      <a:noFill/>
-                    </a:lnR>
-                    <a:lnT w="0">
-                      <a:noFill/>
-                    </a:lnT>
-                    <a:lnB w="0">
-                      <a:noFill/>
-                    </a:lnB>
-                  </a:tcPr>
-                </a:tc>
-              </a:tr>
-              <a:tr h="450000">
-                <a:tc>
-                  <a:txBody>
-                    <a:bodyPr/>
-                    <a:p>
-                      <a:pPr algn="l">
-                        <a:buNone/>
-                      </a:pPr>
-                      <a:endParaRPr lang="en-US" sz="2400">
-                        <a:latin typeface="Courier New Regular" panose="02070609020205020404" charset="0"/>
-                        <a:cs typeface="Courier New Regular" panose="02070609020205020404" charset="0"/>
-                      </a:endParaRPr>
-                    </a:p>
-                  </a:txBody>
-                  <a:tcPr marL="0" marR="0" marT="0" marB="0" vert="horz" anchor="ctr">
-                    <a:lnL w="0">
-                      <a:noFill/>
-                    </a:lnL>
-                    <a:lnR w="0">
-                      <a:noFill/>
-                    </a:lnR>
-                    <a:lnT w="0">
-                      <a:noFill/>
-                    </a:lnT>
-                    <a:lnB w="0">
-                      <a:noFill/>
-                    </a:lnB>
-                  </a:tcPr>
-                </a:tc>
-              </a:tr>
-              <a:tr h="450000">
-                <a:tc>
-                  <a:txBody>
-                    <a:bodyPr/>
-                    <a:p>
-                      <a:pPr algn="ctr">
-                        <a:buNone/>
-                      </a:pPr>
-                      <a:endParaRPr lang="en-US" sz="2400">
-                        <a:latin typeface="Times New Roman Regular" panose="02020603050405020304" charset="0"/>
-                        <a:cs typeface="Times New Roman Regular" panose="02020603050405020304" charset="0"/>
-                      </a:endParaRPr>
-                    </a:p>
-                  </a:txBody>
-                  <a:tcPr marL="0" marR="0" marT="0" marB="0" vert="horz" anchor="ctr">
-                    <a:lnL w="0">
-                      <a:noFill/>
-                    </a:lnL>
-                    <a:lnR w="0">
-                      <a:noFill/>
-                    </a:lnR>
-                    <a:lnT w="0">
-                      <a:noFill/>
-                    </a:lnT>
-                    <a:lnB w="0">
-                      <a:noFill/>
-                    </a:lnB>
-                  </a:tcPr>
-                </a:tc>
-              </a:tr>
-            </a:tbl>
-          </a:graphicData>
-        </a:graphic>
-      </p:graphicFrame>
     </p:spTree>
   </p:cSld>
   <p:clrMapOvr>

--- a/Song Template 1.pptx
+++ b/Song Template 1.pptx
@@ -3450,9 +3450,14 @@
             <p:ph idx="1"/>
           </p:nvPr>
         </p:nvSpPr>
-        <p:spPr/>
-        <p:txBody>
-          <a:bodyPr/>
+        <p:spPr>
+          <a:xfrm>
+            <a:off x="838200" y="1320800"/>
+            <a:ext cx="10515600" cy="4534535"/>
+          </a:xfrm>
+        </p:spPr>
+        <p:txBody>
+          <a:bodyPr anchor="ctr" anchorCtr="0"/>
           <a:p>
             <a:pPr marL="0" indent="0" algn="ctr">
               <a:buNone/>

--- a/Song Template 1.pptx
+++ b/Song Template 1.pptx
@@ -5,10 +5,10 @@
     <p:sldMasterId id="2147483648" r:id="rId1"/>
   </p:sldMasterIdLst>
   <p:notesMasterIdLst>
-    <p:notesMasterId r:id="rId4"/>
+    <p:notesMasterId r:id="rId3"/>
   </p:notesMasterIdLst>
   <p:sldIdLst>
-    <p:sldId id="5001" r:id="rId3"/>
+    <p:sldId id="5001" r:id="rId2"/>
   </p:sldIdLst>
   <p:sldSz cx="12192000" cy="6858000"/>
   <p:notesSz cx="6858000" cy="9144000"/>
@@ -208,6 +208,7 @@
           <a:p>
             <a:fld id="{3EFD42F7-718C-4B98-AAEC-167E6DDD60A7}" type="datetimeFigureOut">
               <a:rPr lang="en-US" smtClean="0"/>
+              <a:t>4/22/26</a:t>
             </a:fld>
             <a:endParaRPr lang="en-US"/>
           </a:p>
@@ -271,42 +272,37 @@
           <a:p>
             <a:pPr lvl="0"/>
             <a:r>
-              <a:rPr lang="en-US" smtClean="0"/>
+              <a:rPr lang="en-US"/>
               <a:t>Click to edit Master text styles</a:t>
             </a:r>
-            <a:endParaRPr lang="en-US" smtClean="0"/>
           </a:p>
           <a:p>
             <a:pPr lvl="1"/>
             <a:r>
-              <a:rPr lang="en-US" smtClean="0"/>
+              <a:rPr lang="en-US"/>
               <a:t>Second level</a:t>
             </a:r>
-            <a:endParaRPr lang="en-US" smtClean="0"/>
           </a:p>
           <a:p>
             <a:pPr lvl="2"/>
             <a:r>
-              <a:rPr lang="en-US" smtClean="0"/>
+              <a:rPr lang="en-US"/>
               <a:t>Third level</a:t>
             </a:r>
-            <a:endParaRPr lang="en-US" smtClean="0"/>
           </a:p>
           <a:p>
             <a:pPr lvl="3"/>
             <a:r>
-              <a:rPr lang="en-US" smtClean="0"/>
+              <a:rPr lang="en-US"/>
               <a:t>Fourth level</a:t>
             </a:r>
-            <a:endParaRPr lang="en-US" smtClean="0"/>
           </a:p>
           <a:p>
             <a:pPr lvl="4"/>
             <a:r>
-              <a:rPr lang="en-US" smtClean="0"/>
+              <a:rPr lang="en-US"/>
               <a:t>Fifth level</a:t>
             </a:r>
-            <a:endParaRPr lang="en-US"/>
           </a:p>
         </p:txBody>
       </p:sp>
@@ -370,6 +366,7 @@
           <a:p>
             <a:fld id="{21B2AA4F-B828-4D7C-AFD3-893933DAFCB4}" type="slidenum">
               <a:rPr lang="en-US" smtClean="0"/>
+              <a:t>‹#›</a:t>
             </a:fld>
             <a:endParaRPr lang="en-US"/>
           </a:p>
@@ -482,12 +479,19 @@
         <p:cNvGrpSpPr/>
         <p:nvPr/>
       </p:nvGrpSpPr>
-      <p:grpSpPr/>
+      <p:grpSpPr>
+        <a:xfrm>
+          <a:off x="0" y="0"/>
+          <a:ext cx="0" cy="0"/>
+          <a:chOff x="0" y="0"/>
+          <a:chExt cx="0" cy="0"/>
+        </a:xfrm>
+      </p:grpSpPr>
       <p:sp>
         <p:nvSpPr>
           <p:cNvPr id="2" name="Slide Image Placeholder 1"/>
           <p:cNvSpPr>
-            <a:spLocks noGrp="1"/>
+            <a:spLocks noGrp="1" noRot="1" noChangeAspect="1"/>
           </p:cNvSpPr>
           <p:nvPr>
             <p:ph type="sldImg" idx="2"/>
@@ -508,12 +512,15 @@
         <p:spPr/>
         <p:txBody>
           <a:bodyPr/>
-          <a:p>
-            <a:r>
-              <a:rPr lang="en-US"/>
+          <a:lstStyle/>
+          <a:p>
+            <a:r>
+              <a:rPr lang="en-US" dirty="0">
+                <a:latin typeface="Courier New" panose="02070309020205020404" pitchFamily="49" charset="0"/>
+                <a:cs typeface="Courier New" panose="02070309020205020404" pitchFamily="49" charset="0"/>
+              </a:rPr>
               <a:t>[Presenter Note]</a:t>
             </a:r>
-            <a:endParaRPr lang="en-US"/>
           </a:p>
         </p:txBody>
       </p:sp>
@@ -567,10 +574,9 @@
           </a:lstStyle>
           <a:p>
             <a:r>
-              <a:rPr lang="en-US" smtClean="0"/>
+              <a:rPr lang="en-US"/>
               <a:t>Click to edit Master title style</a:t>
             </a:r>
-            <a:endParaRPr lang="en-US"/>
           </a:p>
         </p:txBody>
       </p:sp>
@@ -632,10 +638,9 @@
           </a:lstStyle>
           <a:p>
             <a:r>
-              <a:rPr lang="en-US" smtClean="0"/>
+              <a:rPr lang="en-US"/>
               <a:t>Click to edit Master subtitle style</a:t>
             </a:r>
-            <a:endParaRPr lang="en-US"/>
           </a:p>
         </p:txBody>
       </p:sp>
@@ -656,6 +661,7 @@
           <a:p>
             <a:fld id="{63A1C593-65D0-4073-BCC9-577B9352EA97}" type="datetimeFigureOut">
               <a:rPr lang="en-US" smtClean="0"/>
+              <a:t>4/22/26</a:t>
             </a:fld>
             <a:endParaRPr lang="en-US"/>
           </a:p>
@@ -680,7 +686,6 @@
               <a:rPr lang="en-US"/>
               <a:t>[Copyright Info]</a:t>
             </a:r>
-            <a:endParaRPr lang="en-US"/>
           </a:p>
         </p:txBody>
       </p:sp>
@@ -701,6 +706,7 @@
           <a:p>
             <a:fld id="{9B618960-8005-486C-9A75-10CB2AAC16F9}" type="slidenum">
               <a:rPr lang="en-US" smtClean="0"/>
+              <a:t>‹#›</a:t>
             </a:fld>
             <a:endParaRPr lang="en-US"/>
           </a:p>
@@ -748,10 +754,9 @@
           <a:lstStyle/>
           <a:p>
             <a:r>
-              <a:rPr lang="en-US" smtClean="0"/>
+              <a:rPr lang="en-US"/>
               <a:t>Click to edit Master title style</a:t>
             </a:r>
-            <a:endParaRPr lang="en-US"/>
           </a:p>
         </p:txBody>
       </p:sp>
@@ -772,42 +777,37 @@
           <a:p>
             <a:pPr lvl="0"/>
             <a:r>
-              <a:rPr lang="en-US" smtClean="0"/>
+              <a:rPr lang="en-US"/>
               <a:t>Click to edit Master text styles</a:t>
             </a:r>
-            <a:endParaRPr lang="en-US" smtClean="0"/>
           </a:p>
           <a:p>
             <a:pPr lvl="1"/>
             <a:r>
-              <a:rPr lang="en-US" smtClean="0"/>
+              <a:rPr lang="en-US"/>
               <a:t>Second level</a:t>
             </a:r>
-            <a:endParaRPr lang="en-US" smtClean="0"/>
           </a:p>
           <a:p>
             <a:pPr lvl="2"/>
             <a:r>
-              <a:rPr lang="en-US" smtClean="0"/>
+              <a:rPr lang="en-US"/>
               <a:t>Third level</a:t>
             </a:r>
-            <a:endParaRPr lang="en-US" smtClean="0"/>
           </a:p>
           <a:p>
             <a:pPr lvl="3"/>
             <a:r>
-              <a:rPr lang="en-US" smtClean="0"/>
+              <a:rPr lang="en-US"/>
               <a:t>Fourth level</a:t>
             </a:r>
-            <a:endParaRPr lang="en-US" smtClean="0"/>
           </a:p>
           <a:p>
             <a:pPr lvl="4"/>
             <a:r>
-              <a:rPr lang="en-US" smtClean="0"/>
+              <a:rPr lang="en-US"/>
               <a:t>Fifth level</a:t>
             </a:r>
-            <a:endParaRPr lang="en-US"/>
           </a:p>
         </p:txBody>
       </p:sp>
@@ -828,6 +828,7 @@
           <a:p>
             <a:fld id="{63A1C593-65D0-4073-BCC9-577B9352EA97}" type="datetimeFigureOut">
               <a:rPr lang="en-US" smtClean="0"/>
+              <a:t>4/22/26</a:t>
             </a:fld>
             <a:endParaRPr lang="en-US"/>
           </a:p>
@@ -852,7 +853,6 @@
               <a:rPr lang="en-US"/>
               <a:t>[Copyright Info]</a:t>
             </a:r>
-            <a:endParaRPr lang="en-US"/>
           </a:p>
         </p:txBody>
       </p:sp>
@@ -873,6 +873,7 @@
           <a:p>
             <a:fld id="{9B618960-8005-486C-9A75-10CB2AAC16F9}" type="slidenum">
               <a:rPr lang="en-US" smtClean="0"/>
+              <a:t>‹#›</a:t>
             </a:fld>
             <a:endParaRPr lang="en-US"/>
           </a:p>
@@ -925,10 +926,9 @@
           <a:lstStyle/>
           <a:p>
             <a:r>
-              <a:rPr lang="en-US" smtClean="0"/>
+              <a:rPr lang="en-US"/>
               <a:t>Click to edit Master title style</a:t>
             </a:r>
-            <a:endParaRPr lang="en-US"/>
           </a:p>
         </p:txBody>
       </p:sp>
@@ -954,42 +954,37 @@
           <a:p>
             <a:pPr lvl="0"/>
             <a:r>
-              <a:rPr lang="en-US" smtClean="0"/>
+              <a:rPr lang="en-US"/>
               <a:t>Click to edit Master text styles</a:t>
             </a:r>
-            <a:endParaRPr lang="en-US" smtClean="0"/>
           </a:p>
           <a:p>
             <a:pPr lvl="1"/>
             <a:r>
-              <a:rPr lang="en-US" smtClean="0"/>
+              <a:rPr lang="en-US"/>
               <a:t>Second level</a:t>
             </a:r>
-            <a:endParaRPr lang="en-US" smtClean="0"/>
           </a:p>
           <a:p>
             <a:pPr lvl="2"/>
             <a:r>
-              <a:rPr lang="en-US" smtClean="0"/>
+              <a:rPr lang="en-US"/>
               <a:t>Third level</a:t>
             </a:r>
-            <a:endParaRPr lang="en-US" smtClean="0"/>
           </a:p>
           <a:p>
             <a:pPr lvl="3"/>
             <a:r>
-              <a:rPr lang="en-US" smtClean="0"/>
+              <a:rPr lang="en-US"/>
               <a:t>Fourth level</a:t>
             </a:r>
-            <a:endParaRPr lang="en-US" smtClean="0"/>
           </a:p>
           <a:p>
             <a:pPr lvl="4"/>
             <a:r>
-              <a:rPr lang="en-US" smtClean="0"/>
+              <a:rPr lang="en-US"/>
               <a:t>Fifth level</a:t>
             </a:r>
-            <a:endParaRPr lang="en-US"/>
           </a:p>
         </p:txBody>
       </p:sp>
@@ -1010,6 +1005,7 @@
           <a:p>
             <a:fld id="{63A1C593-65D0-4073-BCC9-577B9352EA97}" type="datetimeFigureOut">
               <a:rPr lang="en-US" smtClean="0"/>
+              <a:t>4/22/26</a:t>
             </a:fld>
             <a:endParaRPr lang="en-US"/>
           </a:p>
@@ -1034,7 +1030,6 @@
               <a:rPr lang="en-US"/>
               <a:t>[Copyright Info]</a:t>
             </a:r>
-            <a:endParaRPr lang="en-US"/>
           </a:p>
         </p:txBody>
       </p:sp>
@@ -1055,6 +1050,7 @@
           <a:p>
             <a:fld id="{9B618960-8005-486C-9A75-10CB2AAC16F9}" type="slidenum">
               <a:rPr lang="en-US" smtClean="0"/>
+              <a:t>‹#›</a:t>
             </a:fld>
             <a:endParaRPr lang="en-US"/>
           </a:p>
@@ -1102,10 +1098,9 @@
           <a:lstStyle/>
           <a:p>
             <a:r>
-              <a:rPr lang="en-US" smtClean="0"/>
+              <a:rPr lang="en-US"/>
               <a:t>Click to edit Master title style</a:t>
             </a:r>
-            <a:endParaRPr lang="en-US"/>
           </a:p>
         </p:txBody>
       </p:sp>
@@ -1126,42 +1121,37 @@
           <a:p>
             <a:pPr lvl="0"/>
             <a:r>
-              <a:rPr lang="en-US" smtClean="0"/>
+              <a:rPr lang="en-US"/>
               <a:t>Click to edit Master text styles</a:t>
             </a:r>
-            <a:endParaRPr lang="en-US" smtClean="0"/>
           </a:p>
           <a:p>
             <a:pPr lvl="1"/>
             <a:r>
-              <a:rPr lang="en-US" smtClean="0"/>
+              <a:rPr lang="en-US"/>
               <a:t>Second level</a:t>
             </a:r>
-            <a:endParaRPr lang="en-US" smtClean="0"/>
           </a:p>
           <a:p>
             <a:pPr lvl="2"/>
             <a:r>
-              <a:rPr lang="en-US" smtClean="0"/>
+              <a:rPr lang="en-US"/>
               <a:t>Third level</a:t>
             </a:r>
-            <a:endParaRPr lang="en-US" smtClean="0"/>
           </a:p>
           <a:p>
             <a:pPr lvl="3"/>
             <a:r>
-              <a:rPr lang="en-US" smtClean="0"/>
+              <a:rPr lang="en-US"/>
               <a:t>Fourth level</a:t>
             </a:r>
-            <a:endParaRPr lang="en-US" smtClean="0"/>
           </a:p>
           <a:p>
             <a:pPr lvl="4"/>
             <a:r>
-              <a:rPr lang="en-US" smtClean="0"/>
+              <a:rPr lang="en-US"/>
               <a:t>Fifth level</a:t>
             </a:r>
-            <a:endParaRPr lang="en-US"/>
           </a:p>
         </p:txBody>
       </p:sp>
@@ -1182,6 +1172,7 @@
           <a:p>
             <a:fld id="{63A1C593-65D0-4073-BCC9-577B9352EA97}" type="datetimeFigureOut">
               <a:rPr lang="en-US" smtClean="0"/>
+              <a:t>4/22/26</a:t>
             </a:fld>
             <a:endParaRPr lang="en-US"/>
           </a:p>
@@ -1206,7 +1197,6 @@
               <a:rPr lang="en-US"/>
               <a:t>[Copyright Info]</a:t>
             </a:r>
-            <a:endParaRPr lang="en-US"/>
           </a:p>
         </p:txBody>
       </p:sp>
@@ -1227,6 +1217,7 @@
           <a:p>
             <a:fld id="{9B618960-8005-486C-9A75-10CB2AAC16F9}" type="slidenum">
               <a:rPr lang="en-US" smtClean="0"/>
+              <a:t>‹#›</a:t>
             </a:fld>
             <a:endParaRPr lang="en-US"/>
           </a:p>
@@ -1283,10 +1274,9 @@
           </a:lstStyle>
           <a:p>
             <a:r>
-              <a:rPr lang="en-US" smtClean="0"/>
+              <a:rPr lang="en-US"/>
               <a:t>Click to edit Master title style</a:t>
             </a:r>
-            <a:endParaRPr lang="en-US"/>
           </a:p>
         </p:txBody>
       </p:sp>
@@ -1403,10 +1393,9 @@
           <a:p>
             <a:pPr lvl="0"/>
             <a:r>
-              <a:rPr lang="en-US" smtClean="0"/>
+              <a:rPr lang="en-US"/>
               <a:t>Click to edit Master text styles</a:t>
             </a:r>
-            <a:endParaRPr lang="en-US" smtClean="0"/>
           </a:p>
         </p:txBody>
       </p:sp>
@@ -1427,6 +1416,7 @@
           <a:p>
             <a:fld id="{63A1C593-65D0-4073-BCC9-577B9352EA97}" type="datetimeFigureOut">
               <a:rPr lang="en-US" smtClean="0"/>
+              <a:t>4/22/26</a:t>
             </a:fld>
             <a:endParaRPr lang="en-US"/>
           </a:p>
@@ -1451,7 +1441,6 @@
               <a:rPr lang="en-US"/>
               <a:t>[Copyright Info]</a:t>
             </a:r>
-            <a:endParaRPr lang="en-US"/>
           </a:p>
         </p:txBody>
       </p:sp>
@@ -1472,6 +1461,7 @@
           <a:p>
             <a:fld id="{9B618960-8005-486C-9A75-10CB2AAC16F9}" type="slidenum">
               <a:rPr lang="en-US" smtClean="0"/>
+              <a:t>‹#›</a:t>
             </a:fld>
             <a:endParaRPr lang="en-US"/>
           </a:p>
@@ -1519,10 +1509,9 @@
           <a:lstStyle/>
           <a:p>
             <a:r>
-              <a:rPr lang="en-US" smtClean="0"/>
+              <a:rPr lang="en-US"/>
               <a:t>Click to edit Master title style</a:t>
             </a:r>
-            <a:endParaRPr lang="en-US"/>
           </a:p>
         </p:txBody>
       </p:sp>
@@ -1548,42 +1537,37 @@
           <a:p>
             <a:pPr lvl="0"/>
             <a:r>
-              <a:rPr lang="en-US" smtClean="0"/>
+              <a:rPr lang="en-US"/>
               <a:t>Click to edit Master text styles</a:t>
             </a:r>
-            <a:endParaRPr lang="en-US" smtClean="0"/>
           </a:p>
           <a:p>
             <a:pPr lvl="1"/>
             <a:r>
-              <a:rPr lang="en-US" smtClean="0"/>
+              <a:rPr lang="en-US"/>
               <a:t>Second level</a:t>
             </a:r>
-            <a:endParaRPr lang="en-US" smtClean="0"/>
           </a:p>
           <a:p>
             <a:pPr lvl="2"/>
             <a:r>
-              <a:rPr lang="en-US" smtClean="0"/>
+              <a:rPr lang="en-US"/>
               <a:t>Third level</a:t>
             </a:r>
-            <a:endParaRPr lang="en-US" smtClean="0"/>
           </a:p>
           <a:p>
             <a:pPr lvl="3"/>
             <a:r>
-              <a:rPr lang="en-US" smtClean="0"/>
+              <a:rPr lang="en-US"/>
               <a:t>Fourth level</a:t>
             </a:r>
-            <a:endParaRPr lang="en-US" smtClean="0"/>
           </a:p>
           <a:p>
             <a:pPr lvl="4"/>
             <a:r>
-              <a:rPr lang="en-US" smtClean="0"/>
+              <a:rPr lang="en-US"/>
               <a:t>Fifth level</a:t>
             </a:r>
-            <a:endParaRPr lang="en-US"/>
           </a:p>
         </p:txBody>
       </p:sp>
@@ -1609,42 +1593,37 @@
           <a:p>
             <a:pPr lvl="0"/>
             <a:r>
-              <a:rPr lang="en-US" smtClean="0"/>
+              <a:rPr lang="en-US"/>
               <a:t>Click to edit Master text styles</a:t>
             </a:r>
-            <a:endParaRPr lang="en-US" smtClean="0"/>
           </a:p>
           <a:p>
             <a:pPr lvl="1"/>
             <a:r>
-              <a:rPr lang="en-US" smtClean="0"/>
+              <a:rPr lang="en-US"/>
               <a:t>Second level</a:t>
             </a:r>
-            <a:endParaRPr lang="en-US" smtClean="0"/>
           </a:p>
           <a:p>
             <a:pPr lvl="2"/>
             <a:r>
-              <a:rPr lang="en-US" smtClean="0"/>
+              <a:rPr lang="en-US"/>
               <a:t>Third level</a:t>
             </a:r>
-            <a:endParaRPr lang="en-US" smtClean="0"/>
           </a:p>
           <a:p>
             <a:pPr lvl="3"/>
             <a:r>
-              <a:rPr lang="en-US" smtClean="0"/>
+              <a:rPr lang="en-US"/>
               <a:t>Fourth level</a:t>
             </a:r>
-            <a:endParaRPr lang="en-US" smtClean="0"/>
           </a:p>
           <a:p>
             <a:pPr lvl="4"/>
             <a:r>
-              <a:rPr lang="en-US" smtClean="0"/>
+              <a:rPr lang="en-US"/>
               <a:t>Fifth level</a:t>
             </a:r>
-            <a:endParaRPr lang="en-US"/>
           </a:p>
         </p:txBody>
       </p:sp>
@@ -1665,6 +1644,7 @@
           <a:p>
             <a:fld id="{63A1C593-65D0-4073-BCC9-577B9352EA97}" type="datetimeFigureOut">
               <a:rPr lang="en-US" smtClean="0"/>
+              <a:t>4/22/26</a:t>
             </a:fld>
             <a:endParaRPr lang="en-US"/>
           </a:p>
@@ -1689,7 +1669,6 @@
               <a:rPr lang="en-US"/>
               <a:t>[Copyright Info]</a:t>
             </a:r>
-            <a:endParaRPr lang="en-US"/>
           </a:p>
         </p:txBody>
       </p:sp>
@@ -1710,6 +1689,7 @@
           <a:p>
             <a:fld id="{9B618960-8005-486C-9A75-10CB2AAC16F9}" type="slidenum">
               <a:rPr lang="en-US" smtClean="0"/>
+              <a:t>‹#›</a:t>
             </a:fld>
             <a:endParaRPr lang="en-US"/>
           </a:p>
@@ -1762,10 +1742,9 @@
           <a:lstStyle/>
           <a:p>
             <a:r>
-              <a:rPr lang="en-US" smtClean="0"/>
+              <a:rPr lang="en-US"/>
               <a:t>Click to edit Master title style</a:t>
             </a:r>
-            <a:endParaRPr lang="en-US"/>
           </a:p>
         </p:txBody>
       </p:sp>
@@ -1828,10 +1807,9 @@
           <a:p>
             <a:pPr lvl="0"/>
             <a:r>
-              <a:rPr lang="en-US" smtClean="0"/>
+              <a:rPr lang="en-US"/>
               <a:t>Click to edit Master text styles</a:t>
             </a:r>
-            <a:endParaRPr lang="en-US" smtClean="0"/>
           </a:p>
         </p:txBody>
       </p:sp>
@@ -1857,42 +1835,37 @@
           <a:p>
             <a:pPr lvl="0"/>
             <a:r>
-              <a:rPr lang="en-US" smtClean="0"/>
+              <a:rPr lang="en-US"/>
               <a:t>Click to edit Master text styles</a:t>
             </a:r>
-            <a:endParaRPr lang="en-US" smtClean="0"/>
           </a:p>
           <a:p>
             <a:pPr lvl="1"/>
             <a:r>
-              <a:rPr lang="en-US" smtClean="0"/>
+              <a:rPr lang="en-US"/>
               <a:t>Second level</a:t>
             </a:r>
-            <a:endParaRPr lang="en-US" smtClean="0"/>
           </a:p>
           <a:p>
             <a:pPr lvl="2"/>
             <a:r>
-              <a:rPr lang="en-US" smtClean="0"/>
+              <a:rPr lang="en-US"/>
               <a:t>Third level</a:t>
             </a:r>
-            <a:endParaRPr lang="en-US" smtClean="0"/>
           </a:p>
           <a:p>
             <a:pPr lvl="3"/>
             <a:r>
-              <a:rPr lang="en-US" smtClean="0"/>
+              <a:rPr lang="en-US"/>
               <a:t>Fourth level</a:t>
             </a:r>
-            <a:endParaRPr lang="en-US" smtClean="0"/>
           </a:p>
           <a:p>
             <a:pPr lvl="4"/>
             <a:r>
-              <a:rPr lang="en-US" smtClean="0"/>
+              <a:rPr lang="en-US"/>
               <a:t>Fifth level</a:t>
             </a:r>
-            <a:endParaRPr lang="en-US"/>
           </a:p>
         </p:txBody>
       </p:sp>
@@ -1955,10 +1928,9 @@
           <a:p>
             <a:pPr lvl="0"/>
             <a:r>
-              <a:rPr lang="en-US" smtClean="0"/>
+              <a:rPr lang="en-US"/>
               <a:t>Click to edit Master text styles</a:t>
             </a:r>
-            <a:endParaRPr lang="en-US" smtClean="0"/>
           </a:p>
         </p:txBody>
       </p:sp>
@@ -1984,42 +1956,37 @@
           <a:p>
             <a:pPr lvl="0"/>
             <a:r>
-              <a:rPr lang="en-US" smtClean="0"/>
+              <a:rPr lang="en-US"/>
               <a:t>Click to edit Master text styles</a:t>
             </a:r>
-            <a:endParaRPr lang="en-US" smtClean="0"/>
           </a:p>
           <a:p>
             <a:pPr lvl="1"/>
             <a:r>
-              <a:rPr lang="en-US" smtClean="0"/>
+              <a:rPr lang="en-US"/>
               <a:t>Second level</a:t>
             </a:r>
-            <a:endParaRPr lang="en-US" smtClean="0"/>
           </a:p>
           <a:p>
             <a:pPr lvl="2"/>
             <a:r>
-              <a:rPr lang="en-US" smtClean="0"/>
+              <a:rPr lang="en-US"/>
               <a:t>Third level</a:t>
             </a:r>
-            <a:endParaRPr lang="en-US" smtClean="0"/>
           </a:p>
           <a:p>
             <a:pPr lvl="3"/>
             <a:r>
-              <a:rPr lang="en-US" smtClean="0"/>
+              <a:rPr lang="en-US"/>
               <a:t>Fourth level</a:t>
             </a:r>
-            <a:endParaRPr lang="en-US" smtClean="0"/>
           </a:p>
           <a:p>
             <a:pPr lvl="4"/>
             <a:r>
-              <a:rPr lang="en-US" smtClean="0"/>
+              <a:rPr lang="en-US"/>
               <a:t>Fifth level</a:t>
             </a:r>
-            <a:endParaRPr lang="en-US"/>
           </a:p>
         </p:txBody>
       </p:sp>
@@ -2040,6 +2007,7 @@
           <a:p>
             <a:fld id="{63A1C593-65D0-4073-BCC9-577B9352EA97}" type="datetimeFigureOut">
               <a:rPr lang="en-US" smtClean="0"/>
+              <a:t>4/22/26</a:t>
             </a:fld>
             <a:endParaRPr lang="en-US"/>
           </a:p>
@@ -2064,7 +2032,6 @@
               <a:rPr lang="en-US"/>
               <a:t>[Copyright Info]</a:t>
             </a:r>
-            <a:endParaRPr lang="en-US"/>
           </a:p>
         </p:txBody>
       </p:sp>
@@ -2085,6 +2052,7 @@
           <a:p>
             <a:fld id="{9B618960-8005-486C-9A75-10CB2AAC16F9}" type="slidenum">
               <a:rPr lang="en-US" smtClean="0"/>
+              <a:t>‹#›</a:t>
             </a:fld>
             <a:endParaRPr lang="en-US"/>
           </a:p>
@@ -2132,10 +2100,9 @@
           <a:lstStyle/>
           <a:p>
             <a:r>
-              <a:rPr lang="en-US" smtClean="0"/>
+              <a:rPr lang="en-US"/>
               <a:t>Click to edit Master title style</a:t>
             </a:r>
-            <a:endParaRPr lang="en-US"/>
           </a:p>
         </p:txBody>
       </p:sp>
@@ -2156,6 +2123,7 @@
           <a:p>
             <a:fld id="{63A1C593-65D0-4073-BCC9-577B9352EA97}" type="datetimeFigureOut">
               <a:rPr lang="en-US" smtClean="0"/>
+              <a:t>4/22/26</a:t>
             </a:fld>
             <a:endParaRPr lang="en-US"/>
           </a:p>
@@ -2180,7 +2148,6 @@
               <a:rPr lang="en-US"/>
               <a:t>[Copyright Info]</a:t>
             </a:r>
-            <a:endParaRPr lang="en-US"/>
           </a:p>
         </p:txBody>
       </p:sp>
@@ -2201,6 +2168,7 @@
           <a:p>
             <a:fld id="{9B618960-8005-486C-9A75-10CB2AAC16F9}" type="slidenum">
               <a:rPr lang="en-US" smtClean="0"/>
+              <a:t>‹#›</a:t>
             </a:fld>
             <a:endParaRPr lang="en-US"/>
           </a:p>
@@ -2249,6 +2217,7 @@
           <a:p>
             <a:fld id="{63A1C593-65D0-4073-BCC9-577B9352EA97}" type="datetimeFigureOut">
               <a:rPr lang="en-US" smtClean="0"/>
+              <a:t>4/22/26</a:t>
             </a:fld>
             <a:endParaRPr lang="en-US"/>
           </a:p>
@@ -2273,7 +2242,6 @@
               <a:rPr lang="en-US"/>
               <a:t>[Copyright Info]</a:t>
             </a:r>
-            <a:endParaRPr lang="en-US"/>
           </a:p>
         </p:txBody>
       </p:sp>
@@ -2294,6 +2262,7 @@
           <a:p>
             <a:fld id="{9B618960-8005-486C-9A75-10CB2AAC16F9}" type="slidenum">
               <a:rPr lang="en-US" smtClean="0"/>
+              <a:t>‹#›</a:t>
             </a:fld>
             <a:endParaRPr lang="en-US"/>
           </a:p>
@@ -2350,10 +2319,9 @@
           </a:lstStyle>
           <a:p>
             <a:r>
-              <a:rPr lang="en-US" smtClean="0"/>
+              <a:rPr lang="en-US"/>
               <a:t>Click to edit Master title style</a:t>
             </a:r>
-            <a:endParaRPr lang="en-US"/>
           </a:p>
         </p:txBody>
       </p:sp>
@@ -2407,42 +2375,37 @@
           <a:p>
             <a:pPr lvl="0"/>
             <a:r>
-              <a:rPr lang="en-US" smtClean="0"/>
+              <a:rPr lang="en-US"/>
               <a:t>Click to edit Master text styles</a:t>
             </a:r>
-            <a:endParaRPr lang="en-US" smtClean="0"/>
           </a:p>
           <a:p>
             <a:pPr lvl="1"/>
             <a:r>
-              <a:rPr lang="en-US" smtClean="0"/>
+              <a:rPr lang="en-US"/>
               <a:t>Second level</a:t>
             </a:r>
-            <a:endParaRPr lang="en-US" smtClean="0"/>
           </a:p>
           <a:p>
             <a:pPr lvl="2"/>
             <a:r>
-              <a:rPr lang="en-US" smtClean="0"/>
+              <a:rPr lang="en-US"/>
               <a:t>Third level</a:t>
             </a:r>
-            <a:endParaRPr lang="en-US" smtClean="0"/>
           </a:p>
           <a:p>
             <a:pPr lvl="3"/>
             <a:r>
-              <a:rPr lang="en-US" smtClean="0"/>
+              <a:rPr lang="en-US"/>
               <a:t>Fourth level</a:t>
             </a:r>
-            <a:endParaRPr lang="en-US" smtClean="0"/>
           </a:p>
           <a:p>
             <a:pPr lvl="4"/>
             <a:r>
-              <a:rPr lang="en-US" smtClean="0"/>
+              <a:rPr lang="en-US"/>
               <a:t>Fifth level</a:t>
             </a:r>
-            <a:endParaRPr lang="en-US"/>
           </a:p>
         </p:txBody>
       </p:sp>
@@ -2505,10 +2468,9 @@
           <a:p>
             <a:pPr lvl="0"/>
             <a:r>
-              <a:rPr lang="en-US" smtClean="0"/>
+              <a:rPr lang="en-US"/>
               <a:t>Click to edit Master text styles</a:t>
             </a:r>
-            <a:endParaRPr lang="en-US" smtClean="0"/>
           </a:p>
         </p:txBody>
       </p:sp>
@@ -2529,6 +2491,7 @@
           <a:p>
             <a:fld id="{63A1C593-65D0-4073-BCC9-577B9352EA97}" type="datetimeFigureOut">
               <a:rPr lang="en-US" smtClean="0"/>
+              <a:t>4/22/26</a:t>
             </a:fld>
             <a:endParaRPr lang="en-US"/>
           </a:p>
@@ -2553,7 +2516,6 @@
               <a:rPr lang="en-US"/>
               <a:t>[Copyright Info]</a:t>
             </a:r>
-            <a:endParaRPr lang="en-US"/>
           </a:p>
         </p:txBody>
       </p:sp>
@@ -2574,6 +2536,7 @@
           <a:p>
             <a:fld id="{9B618960-8005-486C-9A75-10CB2AAC16F9}" type="slidenum">
               <a:rPr lang="en-US" smtClean="0"/>
+              <a:t>‹#›</a:t>
             </a:fld>
             <a:endParaRPr lang="en-US"/>
           </a:p>
@@ -2630,10 +2593,9 @@
           </a:lstStyle>
           <a:p>
             <a:r>
-              <a:rPr lang="en-US" smtClean="0"/>
+              <a:rPr lang="en-US"/>
               <a:t>Click to edit Master title style</a:t>
             </a:r>
-            <a:endParaRPr lang="en-US"/>
           </a:p>
         </p:txBody>
       </p:sp>
@@ -2757,10 +2719,9 @@
           <a:p>
             <a:pPr lvl="0"/>
             <a:r>
-              <a:rPr lang="en-US" smtClean="0"/>
+              <a:rPr lang="en-US"/>
               <a:t>Click to edit Master text styles</a:t>
             </a:r>
-            <a:endParaRPr lang="en-US" smtClean="0"/>
           </a:p>
         </p:txBody>
       </p:sp>
@@ -2781,6 +2742,7 @@
           <a:p>
             <a:fld id="{63A1C593-65D0-4073-BCC9-577B9352EA97}" type="datetimeFigureOut">
               <a:rPr lang="en-US" smtClean="0"/>
+              <a:t>4/22/26</a:t>
             </a:fld>
             <a:endParaRPr lang="en-US"/>
           </a:p>
@@ -2805,7 +2767,6 @@
               <a:rPr lang="en-US"/>
               <a:t>[Copyright Info]</a:t>
             </a:r>
-            <a:endParaRPr lang="en-US"/>
           </a:p>
         </p:txBody>
       </p:sp>
@@ -2826,6 +2787,7 @@
           <a:p>
             <a:fld id="{9B618960-8005-486C-9A75-10CB2AAC16F9}" type="slidenum">
               <a:rPr lang="en-US" smtClean="0"/>
+              <a:t>‹#›</a:t>
             </a:fld>
             <a:endParaRPr lang="en-US"/>
           </a:p>
@@ -2846,7 +2808,7 @@
     <p:bg>
       <p:bgPr>
         <a:blipFill rotWithShape="1">
-          <a:blip r:embed="rId12"/>
+          <a:blip r:embed="rId13"/>
           <a:stretch>
             <a:fillRect/>
           </a:stretch>
@@ -2894,10 +2856,9 @@
           <a:lstStyle/>
           <a:p>
             <a:r>
-              <a:rPr lang="en-US" smtClean="0"/>
+              <a:rPr lang="en-US"/>
               <a:t>Click to edit Master title style</a:t>
             </a:r>
-            <a:endParaRPr lang="en-US"/>
           </a:p>
         </p:txBody>
       </p:sp>
@@ -2928,42 +2889,37 @@
           <a:p>
             <a:pPr lvl="0"/>
             <a:r>
-              <a:rPr lang="en-US" smtClean="0"/>
+              <a:rPr lang="en-US"/>
               <a:t>Click to edit Master text styles</a:t>
             </a:r>
-            <a:endParaRPr lang="en-US" smtClean="0"/>
           </a:p>
           <a:p>
             <a:pPr lvl="1"/>
             <a:r>
-              <a:rPr lang="en-US" smtClean="0"/>
+              <a:rPr lang="en-US"/>
               <a:t>Second level</a:t>
             </a:r>
-            <a:endParaRPr lang="en-US" smtClean="0"/>
           </a:p>
           <a:p>
             <a:pPr lvl="2"/>
             <a:r>
-              <a:rPr lang="en-US" smtClean="0"/>
+              <a:rPr lang="en-US"/>
               <a:t>Third level</a:t>
             </a:r>
-            <a:endParaRPr lang="en-US" smtClean="0"/>
           </a:p>
           <a:p>
             <a:pPr lvl="3"/>
             <a:r>
-              <a:rPr lang="en-US" smtClean="0"/>
+              <a:rPr lang="en-US"/>
               <a:t>Fourth level</a:t>
             </a:r>
-            <a:endParaRPr lang="en-US" smtClean="0"/>
           </a:p>
           <a:p>
             <a:pPr lvl="4"/>
             <a:r>
-              <a:rPr lang="en-US" smtClean="0"/>
+              <a:rPr lang="en-US"/>
               <a:t>Fifth level</a:t>
             </a:r>
-            <a:endParaRPr lang="en-US"/>
           </a:p>
         </p:txBody>
       </p:sp>
@@ -3002,6 +2958,7 @@
           <a:p>
             <a:fld id="{63A1C593-65D0-4073-BCC9-577B9352EA97}" type="datetimeFigureOut">
               <a:rPr lang="en-US" smtClean="0"/>
+              <a:t>4/22/26</a:t>
             </a:fld>
             <a:endParaRPr lang="en-US"/>
           </a:p>
@@ -3046,7 +3003,6 @@
               <a:rPr lang="en-US"/>
               <a:t>[Copyright Info]</a:t>
             </a:r>
-            <a:endParaRPr lang="en-US"/>
           </a:p>
         </p:txBody>
       </p:sp>
@@ -3085,6 +3041,7 @@
           <a:p>
             <a:fld id="{9B618960-8005-486C-9A75-10CB2AAC16F9}" type="slidenum">
               <a:rPr lang="en-US" smtClean="0"/>
+              <a:t>‹#›</a:t>
             </a:fld>
             <a:endParaRPr lang="en-US"/>
           </a:p>
@@ -3396,7 +3353,7 @@
     <p:bg>
       <p:bgPr>
         <a:blipFill>
-          <a:blip r:embed="rId1"/>
+          <a:blip r:embed="rId3"/>
           <a:stretch>
             <a:fillRect/>
           </a:stretch>
@@ -3410,7 +3367,14 @@
         <p:cNvGrpSpPr/>
         <p:nvPr/>
       </p:nvGrpSpPr>
-      <p:grpSpPr/>
+      <p:grpSpPr>
+        <a:xfrm>
+          <a:off x="0" y="0"/>
+          <a:ext cx="0" cy="0"/>
+          <a:chOff x="0" y="0"/>
+          <a:chExt cx="0" cy="0"/>
+        </a:xfrm>
+      </p:grpSpPr>
       <p:sp>
         <p:nvSpPr>
           <p:cNvPr id="3" name="Title 2"/>
@@ -3424,6 +3388,7 @@
         <p:spPr/>
         <p:txBody>
           <a:bodyPr/>
+          <a:lstStyle/>
           <a:p>
             <a:pPr algn="ctr"/>
             <a:r>
@@ -3433,10 +3398,6 @@
               </a:rPr>
               <a:t>[ TITLE ]</a:t>
             </a:r>
-            <a:endParaRPr lang="en-US" sz="4000" b="1">
-              <a:latin typeface="Times New Roman Bold" panose="02020603050405020304" charset="0"/>
-              <a:cs typeface="Times New Roman Bold" panose="02020603050405020304" charset="0"/>
-            </a:endParaRPr>
           </a:p>
         </p:txBody>
       </p:sp>
@@ -3458,6 +3419,7 @@
         </p:spPr>
         <p:txBody>
           <a:bodyPr anchor="ctr" anchorCtr="0"/>
+          <a:lstStyle/>
           <a:p>
             <a:pPr marL="0" indent="0" algn="ctr">
               <a:buNone/>
@@ -3485,6 +3447,7 @@
         <p:spPr/>
         <p:txBody>
           <a:bodyPr/>
+          <a:lstStyle/>
           <a:p>
             <a:r>
               <a:rPr lang="en-US">
@@ -3496,13 +3459,6 @@
               </a:rPr>
               <a:t>[Copyright Info]</a:t>
             </a:r>
-            <a:endParaRPr lang="en-US">
-              <a:solidFill>
-                <a:schemeClr val="tx2"/>
-              </a:solidFill>
-              <a:latin typeface="Times New Roman Regular" panose="02020603050405020304" charset="0"/>
-              <a:cs typeface="Times New Roman Regular" panose="02020603050405020304" charset="0"/>
-            </a:endParaRPr>
           </a:p>
         </p:txBody>
       </p:sp>
@@ -3765,6 +3721,8 @@
       </a:bgFillStyleLst>
     </a:fmtScheme>
   </a:themeElements>
+  <a:objectDefaults/>
+  <a:extraClrSchemeLst/>
   <a:extLst>
     <a:ext uri="{05A4C25C-085E-4340-85A3-A5531E510DB2}">
       <thm15:themeFamily xmlns:thm15="http://schemas.microsoft.com/office/thememl/2012/main" name="Office Theme" id="{62F939B6-93AF-4DB8-9C6B-D6C7DFDC589F}" vid="{4A3C46E8-61CC-4603-A589-7422A47A8E4A}"/>
@@ -4024,6 +3982,8 @@
       </a:bgFillStyleLst>
     </a:fmtScheme>
   </a:themeElements>
+  <a:objectDefaults/>
+  <a:extraClrSchemeLst/>
   <a:extLst>
     <a:ext uri="{05A4C25C-085E-4340-85A3-A5531E510DB2}">
       <thm15:themeFamily xmlns:thm15="http://schemas.microsoft.com/office/thememl/2012/main" name="Office Theme" id="{62F939B6-93AF-4DB8-9C6B-D6C7DFDC589F}" vid="{4A3C46E8-61CC-4603-A589-7422A47A8E4A}"/>

--- a/Song Template 1.pptx
+++ b/Song Template 1.pptx
@@ -5,10 +5,10 @@
     <p:sldMasterId id="2147483648" r:id="rId1"/>
   </p:sldMasterIdLst>
   <p:notesMasterIdLst>
-    <p:notesMasterId r:id="rId3"/>
+    <p:notesMasterId r:id="rId4"/>
   </p:notesMasterIdLst>
   <p:sldIdLst>
-    <p:sldId id="5001" r:id="rId2"/>
+    <p:sldId id="5001" r:id="rId3"/>
   </p:sldIdLst>
   <p:sldSz cx="12192000" cy="6858000"/>
   <p:notesSz cx="6858000" cy="9144000"/>
@@ -208,7 +208,6 @@
           <a:p>
             <a:fld id="{3EFD42F7-718C-4B98-AAEC-167E6DDD60A7}" type="datetimeFigureOut">
               <a:rPr lang="en-US" smtClean="0"/>
-              <a:t>4/22/26</a:t>
             </a:fld>
             <a:endParaRPr lang="en-US"/>
           </a:p>
@@ -275,6 +274,7 @@
               <a:rPr lang="en-US"/>
               <a:t>Click to edit Master text styles</a:t>
             </a:r>
+            <a:endParaRPr lang="en-US"/>
           </a:p>
           <a:p>
             <a:pPr lvl="1"/>
@@ -282,6 +282,7 @@
               <a:rPr lang="en-US"/>
               <a:t>Second level</a:t>
             </a:r>
+            <a:endParaRPr lang="en-US"/>
           </a:p>
           <a:p>
             <a:pPr lvl="2"/>
@@ -289,6 +290,7 @@
               <a:rPr lang="en-US"/>
               <a:t>Third level</a:t>
             </a:r>
+            <a:endParaRPr lang="en-US"/>
           </a:p>
           <a:p>
             <a:pPr lvl="3"/>
@@ -296,6 +298,7 @@
               <a:rPr lang="en-US"/>
               <a:t>Fourth level</a:t>
             </a:r>
+            <a:endParaRPr lang="en-US"/>
           </a:p>
           <a:p>
             <a:pPr lvl="4"/>
@@ -303,6 +306,7 @@
               <a:rPr lang="en-US"/>
               <a:t>Fifth level</a:t>
             </a:r>
+            <a:endParaRPr lang="en-US"/>
           </a:p>
         </p:txBody>
       </p:sp>
@@ -366,7 +370,6 @@
           <a:p>
             <a:fld id="{21B2AA4F-B828-4D7C-AFD3-893933DAFCB4}" type="slidenum">
               <a:rPr lang="en-US" smtClean="0"/>
-              <a:t>‹#›</a:t>
             </a:fld>
             <a:endParaRPr lang="en-US"/>
           </a:p>
@@ -377,53 +380,53 @@
   <p:clrMap bg1="lt1" tx1="dk1" bg2="lt2" tx2="dk2" accent1="accent1" accent2="accent2" accent3="accent3" accent4="accent4" accent5="accent5" accent6="accent6" hlink="hlink" folHlink="folHlink"/>
   <p:notesStyle>
     <a:lvl1pPr marL="0" algn="l" defTabSz="914400" rtl="0" eaLnBrk="1" latinLnBrk="0" hangingPunct="1">
-      <a:defRPr sz="1200" kern="1200">
+      <a:defRPr sz="1600" kern="1200">
         <a:solidFill>
           <a:schemeClr val="tx1"/>
         </a:solidFill>
-        <a:latin typeface="+mn-lt"/>
+        <a:latin typeface="Courier New Regular" panose="02070609020205020404" charset="0"/>
         <a:ea typeface="+mn-ea"/>
-        <a:cs typeface="+mn-cs"/>
+        <a:cs typeface="Courier New Regular" panose="02070609020205020404" charset="0"/>
       </a:defRPr>
     </a:lvl1pPr>
     <a:lvl2pPr marL="457200" algn="l" defTabSz="914400" rtl="0" eaLnBrk="1" latinLnBrk="0" hangingPunct="1">
-      <a:defRPr sz="1200" kern="1200">
+      <a:defRPr sz="1600" kern="1200">
         <a:solidFill>
           <a:schemeClr val="tx1"/>
         </a:solidFill>
-        <a:latin typeface="+mn-lt"/>
+        <a:latin typeface="Courier New Regular" panose="02070609020205020404" charset="0"/>
         <a:ea typeface="+mn-ea"/>
-        <a:cs typeface="+mn-cs"/>
+        <a:cs typeface="Courier New Regular" panose="02070609020205020404" charset="0"/>
       </a:defRPr>
     </a:lvl2pPr>
     <a:lvl3pPr marL="914400" algn="l" defTabSz="914400" rtl="0" eaLnBrk="1" latinLnBrk="0" hangingPunct="1">
-      <a:defRPr sz="1200" kern="1200">
+      <a:defRPr sz="1600" kern="1200">
         <a:solidFill>
           <a:schemeClr val="tx1"/>
         </a:solidFill>
-        <a:latin typeface="+mn-lt"/>
+        <a:latin typeface="Courier New Regular" panose="02070609020205020404" charset="0"/>
         <a:ea typeface="+mn-ea"/>
-        <a:cs typeface="+mn-cs"/>
+        <a:cs typeface="Courier New Regular" panose="02070609020205020404" charset="0"/>
       </a:defRPr>
     </a:lvl3pPr>
     <a:lvl4pPr marL="1371600" algn="l" defTabSz="914400" rtl="0" eaLnBrk="1" latinLnBrk="0" hangingPunct="1">
-      <a:defRPr sz="1200" kern="1200">
+      <a:defRPr sz="1600" kern="1200">
         <a:solidFill>
           <a:schemeClr val="tx1"/>
         </a:solidFill>
-        <a:latin typeface="+mn-lt"/>
+        <a:latin typeface="Courier New Regular" panose="02070609020205020404" charset="0"/>
         <a:ea typeface="+mn-ea"/>
-        <a:cs typeface="+mn-cs"/>
+        <a:cs typeface="Courier New Regular" panose="02070609020205020404" charset="0"/>
       </a:defRPr>
     </a:lvl4pPr>
     <a:lvl5pPr marL="1828800" algn="l" defTabSz="914400" rtl="0" eaLnBrk="1" latinLnBrk="0" hangingPunct="1">
-      <a:defRPr sz="1200" kern="1200">
+      <a:defRPr sz="1400" kern="1200">
         <a:solidFill>
           <a:schemeClr val="tx1"/>
         </a:solidFill>
-        <a:latin typeface="+mn-lt"/>
+        <a:latin typeface="Courier New Regular" panose="02070609020205020404" charset="0"/>
         <a:ea typeface="+mn-ea"/>
-        <a:cs typeface="+mn-cs"/>
+        <a:cs typeface="Courier New Regular" panose="02070609020205020404" charset="0"/>
       </a:defRPr>
     </a:lvl5pPr>
     <a:lvl6pPr marL="2286000" algn="l" defTabSz="914400" rtl="0" eaLnBrk="1" latinLnBrk="0" hangingPunct="1">
@@ -514,13 +517,10 @@
           <a:bodyPr/>
           <a:lstStyle/>
           <a:p>
-            <a:r>
-              <a:rPr lang="en-US" dirty="0">
-                <a:latin typeface="Courier New" panose="02070309020205020404" pitchFamily="49" charset="0"/>
-                <a:cs typeface="Courier New" panose="02070309020205020404" pitchFamily="49" charset="0"/>
-              </a:rPr>
-              <a:t>[Presenter Note]</a:t>
-            </a:r>
+            <a:endParaRPr lang="en-US" altLang="en-US" dirty="0">
+              <a:latin typeface="Courier New" panose="02070609020205020404" pitchFamily="49" charset="0"/>
+              <a:cs typeface="Courier New" panose="02070609020205020404" pitchFamily="49" charset="0"/>
+            </a:endParaRPr>
           </a:p>
         </p:txBody>
       </p:sp>
@@ -577,6 +577,7 @@
               <a:rPr lang="en-US"/>
               <a:t>Click to edit Master title style</a:t>
             </a:r>
+            <a:endParaRPr lang="en-US"/>
           </a:p>
         </p:txBody>
       </p:sp>
@@ -641,6 +642,7 @@
               <a:rPr lang="en-US"/>
               <a:t>Click to edit Master subtitle style</a:t>
             </a:r>
+            <a:endParaRPr lang="en-US"/>
           </a:p>
         </p:txBody>
       </p:sp>
@@ -661,7 +663,6 @@
           <a:p>
             <a:fld id="{63A1C593-65D0-4073-BCC9-577B9352EA97}" type="datetimeFigureOut">
               <a:rPr lang="en-US" smtClean="0"/>
-              <a:t>4/22/26</a:t>
             </a:fld>
             <a:endParaRPr lang="en-US"/>
           </a:p>
@@ -686,6 +687,7 @@
               <a:rPr lang="en-US"/>
               <a:t>[Copyright Info]</a:t>
             </a:r>
+            <a:endParaRPr lang="en-US"/>
           </a:p>
         </p:txBody>
       </p:sp>
@@ -706,7 +708,6 @@
           <a:p>
             <a:fld id="{9B618960-8005-486C-9A75-10CB2AAC16F9}" type="slidenum">
               <a:rPr lang="en-US" smtClean="0"/>
-              <a:t>‹#›</a:t>
             </a:fld>
             <a:endParaRPr lang="en-US"/>
           </a:p>
@@ -757,6 +758,7 @@
               <a:rPr lang="en-US"/>
               <a:t>Click to edit Master title style</a:t>
             </a:r>
+            <a:endParaRPr lang="en-US"/>
           </a:p>
         </p:txBody>
       </p:sp>
@@ -780,6 +782,7 @@
               <a:rPr lang="en-US"/>
               <a:t>Click to edit Master text styles</a:t>
             </a:r>
+            <a:endParaRPr lang="en-US"/>
           </a:p>
           <a:p>
             <a:pPr lvl="1"/>
@@ -787,6 +790,7 @@
               <a:rPr lang="en-US"/>
               <a:t>Second level</a:t>
             </a:r>
+            <a:endParaRPr lang="en-US"/>
           </a:p>
           <a:p>
             <a:pPr lvl="2"/>
@@ -794,6 +798,7 @@
               <a:rPr lang="en-US"/>
               <a:t>Third level</a:t>
             </a:r>
+            <a:endParaRPr lang="en-US"/>
           </a:p>
           <a:p>
             <a:pPr lvl="3"/>
@@ -801,6 +806,7 @@
               <a:rPr lang="en-US"/>
               <a:t>Fourth level</a:t>
             </a:r>
+            <a:endParaRPr lang="en-US"/>
           </a:p>
           <a:p>
             <a:pPr lvl="4"/>
@@ -808,6 +814,7 @@
               <a:rPr lang="en-US"/>
               <a:t>Fifth level</a:t>
             </a:r>
+            <a:endParaRPr lang="en-US"/>
           </a:p>
         </p:txBody>
       </p:sp>
@@ -828,7 +835,6 @@
           <a:p>
             <a:fld id="{63A1C593-65D0-4073-BCC9-577B9352EA97}" type="datetimeFigureOut">
               <a:rPr lang="en-US" smtClean="0"/>
-              <a:t>4/22/26</a:t>
             </a:fld>
             <a:endParaRPr lang="en-US"/>
           </a:p>
@@ -853,6 +859,7 @@
               <a:rPr lang="en-US"/>
               <a:t>[Copyright Info]</a:t>
             </a:r>
+            <a:endParaRPr lang="en-US"/>
           </a:p>
         </p:txBody>
       </p:sp>
@@ -873,7 +880,6 @@
           <a:p>
             <a:fld id="{9B618960-8005-486C-9A75-10CB2AAC16F9}" type="slidenum">
               <a:rPr lang="en-US" smtClean="0"/>
-              <a:t>‹#›</a:t>
             </a:fld>
             <a:endParaRPr lang="en-US"/>
           </a:p>
@@ -929,6 +935,7 @@
               <a:rPr lang="en-US"/>
               <a:t>Click to edit Master title style</a:t>
             </a:r>
+            <a:endParaRPr lang="en-US"/>
           </a:p>
         </p:txBody>
       </p:sp>
@@ -957,6 +964,7 @@
               <a:rPr lang="en-US"/>
               <a:t>Click to edit Master text styles</a:t>
             </a:r>
+            <a:endParaRPr lang="en-US"/>
           </a:p>
           <a:p>
             <a:pPr lvl="1"/>
@@ -964,6 +972,7 @@
               <a:rPr lang="en-US"/>
               <a:t>Second level</a:t>
             </a:r>
+            <a:endParaRPr lang="en-US"/>
           </a:p>
           <a:p>
             <a:pPr lvl="2"/>
@@ -971,6 +980,7 @@
               <a:rPr lang="en-US"/>
               <a:t>Third level</a:t>
             </a:r>
+            <a:endParaRPr lang="en-US"/>
           </a:p>
           <a:p>
             <a:pPr lvl="3"/>
@@ -978,6 +988,7 @@
               <a:rPr lang="en-US"/>
               <a:t>Fourth level</a:t>
             </a:r>
+            <a:endParaRPr lang="en-US"/>
           </a:p>
           <a:p>
             <a:pPr lvl="4"/>
@@ -985,6 +996,7 @@
               <a:rPr lang="en-US"/>
               <a:t>Fifth level</a:t>
             </a:r>
+            <a:endParaRPr lang="en-US"/>
           </a:p>
         </p:txBody>
       </p:sp>
@@ -1005,7 +1017,6 @@
           <a:p>
             <a:fld id="{63A1C593-65D0-4073-BCC9-577B9352EA97}" type="datetimeFigureOut">
               <a:rPr lang="en-US" smtClean="0"/>
-              <a:t>4/22/26</a:t>
             </a:fld>
             <a:endParaRPr lang="en-US"/>
           </a:p>
@@ -1030,6 +1041,7 @@
               <a:rPr lang="en-US"/>
               <a:t>[Copyright Info]</a:t>
             </a:r>
+            <a:endParaRPr lang="en-US"/>
           </a:p>
         </p:txBody>
       </p:sp>
@@ -1050,7 +1062,6 @@
           <a:p>
             <a:fld id="{9B618960-8005-486C-9A75-10CB2AAC16F9}" type="slidenum">
               <a:rPr lang="en-US" smtClean="0"/>
-              <a:t>‹#›</a:t>
             </a:fld>
             <a:endParaRPr lang="en-US"/>
           </a:p>
@@ -1101,6 +1112,7 @@
               <a:rPr lang="en-US"/>
               <a:t>Click to edit Master title style</a:t>
             </a:r>
+            <a:endParaRPr lang="en-US"/>
           </a:p>
         </p:txBody>
       </p:sp>
@@ -1124,6 +1136,7 @@
               <a:rPr lang="en-US"/>
               <a:t>Click to edit Master text styles</a:t>
             </a:r>
+            <a:endParaRPr lang="en-US"/>
           </a:p>
           <a:p>
             <a:pPr lvl="1"/>
@@ -1131,6 +1144,7 @@
               <a:rPr lang="en-US"/>
               <a:t>Second level</a:t>
             </a:r>
+            <a:endParaRPr lang="en-US"/>
           </a:p>
           <a:p>
             <a:pPr lvl="2"/>
@@ -1138,6 +1152,7 @@
               <a:rPr lang="en-US"/>
               <a:t>Third level</a:t>
             </a:r>
+            <a:endParaRPr lang="en-US"/>
           </a:p>
           <a:p>
             <a:pPr lvl="3"/>
@@ -1145,6 +1160,7 @@
               <a:rPr lang="en-US"/>
               <a:t>Fourth level</a:t>
             </a:r>
+            <a:endParaRPr lang="en-US"/>
           </a:p>
           <a:p>
             <a:pPr lvl="4"/>
@@ -1152,6 +1168,7 @@
               <a:rPr lang="en-US"/>
               <a:t>Fifth level</a:t>
             </a:r>
+            <a:endParaRPr lang="en-US"/>
           </a:p>
         </p:txBody>
       </p:sp>
@@ -1172,7 +1189,6 @@
           <a:p>
             <a:fld id="{63A1C593-65D0-4073-BCC9-577B9352EA97}" type="datetimeFigureOut">
               <a:rPr lang="en-US" smtClean="0"/>
-              <a:t>4/22/26</a:t>
             </a:fld>
             <a:endParaRPr lang="en-US"/>
           </a:p>
@@ -1197,6 +1213,7 @@
               <a:rPr lang="en-US"/>
               <a:t>[Copyright Info]</a:t>
             </a:r>
+            <a:endParaRPr lang="en-US"/>
           </a:p>
         </p:txBody>
       </p:sp>
@@ -1217,7 +1234,6 @@
           <a:p>
             <a:fld id="{9B618960-8005-486C-9A75-10CB2AAC16F9}" type="slidenum">
               <a:rPr lang="en-US" smtClean="0"/>
-              <a:t>‹#›</a:t>
             </a:fld>
             <a:endParaRPr lang="en-US"/>
           </a:p>
@@ -1277,6 +1293,7 @@
               <a:rPr lang="en-US"/>
               <a:t>Click to edit Master title style</a:t>
             </a:r>
+            <a:endParaRPr lang="en-US"/>
           </a:p>
         </p:txBody>
       </p:sp>
@@ -1396,6 +1413,7 @@
               <a:rPr lang="en-US"/>
               <a:t>Click to edit Master text styles</a:t>
             </a:r>
+            <a:endParaRPr lang="en-US"/>
           </a:p>
         </p:txBody>
       </p:sp>
@@ -1416,7 +1434,6 @@
           <a:p>
             <a:fld id="{63A1C593-65D0-4073-BCC9-577B9352EA97}" type="datetimeFigureOut">
               <a:rPr lang="en-US" smtClean="0"/>
-              <a:t>4/22/26</a:t>
             </a:fld>
             <a:endParaRPr lang="en-US"/>
           </a:p>
@@ -1441,6 +1458,7 @@
               <a:rPr lang="en-US"/>
               <a:t>[Copyright Info]</a:t>
             </a:r>
+            <a:endParaRPr lang="en-US"/>
           </a:p>
         </p:txBody>
       </p:sp>
@@ -1461,7 +1479,6 @@
           <a:p>
             <a:fld id="{9B618960-8005-486C-9A75-10CB2AAC16F9}" type="slidenum">
               <a:rPr lang="en-US" smtClean="0"/>
-              <a:t>‹#›</a:t>
             </a:fld>
             <a:endParaRPr lang="en-US"/>
           </a:p>
@@ -1512,6 +1529,7 @@
               <a:rPr lang="en-US"/>
               <a:t>Click to edit Master title style</a:t>
             </a:r>
+            <a:endParaRPr lang="en-US"/>
           </a:p>
         </p:txBody>
       </p:sp>
@@ -1540,6 +1558,7 @@
               <a:rPr lang="en-US"/>
               <a:t>Click to edit Master text styles</a:t>
             </a:r>
+            <a:endParaRPr lang="en-US"/>
           </a:p>
           <a:p>
             <a:pPr lvl="1"/>
@@ -1547,6 +1566,7 @@
               <a:rPr lang="en-US"/>
               <a:t>Second level</a:t>
             </a:r>
+            <a:endParaRPr lang="en-US"/>
           </a:p>
           <a:p>
             <a:pPr lvl="2"/>
@@ -1554,6 +1574,7 @@
               <a:rPr lang="en-US"/>
               <a:t>Third level</a:t>
             </a:r>
+            <a:endParaRPr lang="en-US"/>
           </a:p>
           <a:p>
             <a:pPr lvl="3"/>
@@ -1561,6 +1582,7 @@
               <a:rPr lang="en-US"/>
               <a:t>Fourth level</a:t>
             </a:r>
+            <a:endParaRPr lang="en-US"/>
           </a:p>
           <a:p>
             <a:pPr lvl="4"/>
@@ -1568,6 +1590,7 @@
               <a:rPr lang="en-US"/>
               <a:t>Fifth level</a:t>
             </a:r>
+            <a:endParaRPr lang="en-US"/>
           </a:p>
         </p:txBody>
       </p:sp>
@@ -1596,6 +1619,7 @@
               <a:rPr lang="en-US"/>
               <a:t>Click to edit Master text styles</a:t>
             </a:r>
+            <a:endParaRPr lang="en-US"/>
           </a:p>
           <a:p>
             <a:pPr lvl="1"/>
@@ -1603,6 +1627,7 @@
               <a:rPr lang="en-US"/>
               <a:t>Second level</a:t>
             </a:r>
+            <a:endParaRPr lang="en-US"/>
           </a:p>
           <a:p>
             <a:pPr lvl="2"/>
@@ -1610,6 +1635,7 @@
               <a:rPr lang="en-US"/>
               <a:t>Third level</a:t>
             </a:r>
+            <a:endParaRPr lang="en-US"/>
           </a:p>
           <a:p>
             <a:pPr lvl="3"/>
@@ -1617,6 +1643,7 @@
               <a:rPr lang="en-US"/>
               <a:t>Fourth level</a:t>
             </a:r>
+            <a:endParaRPr lang="en-US"/>
           </a:p>
           <a:p>
             <a:pPr lvl="4"/>
@@ -1624,6 +1651,7 @@
               <a:rPr lang="en-US"/>
               <a:t>Fifth level</a:t>
             </a:r>
+            <a:endParaRPr lang="en-US"/>
           </a:p>
         </p:txBody>
       </p:sp>
@@ -1644,7 +1672,6 @@
           <a:p>
             <a:fld id="{63A1C593-65D0-4073-BCC9-577B9352EA97}" type="datetimeFigureOut">
               <a:rPr lang="en-US" smtClean="0"/>
-              <a:t>4/22/26</a:t>
             </a:fld>
             <a:endParaRPr lang="en-US"/>
           </a:p>
@@ -1669,6 +1696,7 @@
               <a:rPr lang="en-US"/>
               <a:t>[Copyright Info]</a:t>
             </a:r>
+            <a:endParaRPr lang="en-US"/>
           </a:p>
         </p:txBody>
       </p:sp>
@@ -1689,7 +1717,6 @@
           <a:p>
             <a:fld id="{9B618960-8005-486C-9A75-10CB2AAC16F9}" type="slidenum">
               <a:rPr lang="en-US" smtClean="0"/>
-              <a:t>‹#›</a:t>
             </a:fld>
             <a:endParaRPr lang="en-US"/>
           </a:p>
@@ -1745,6 +1772,7 @@
               <a:rPr lang="en-US"/>
               <a:t>Click to edit Master title style</a:t>
             </a:r>
+            <a:endParaRPr lang="en-US"/>
           </a:p>
         </p:txBody>
       </p:sp>
@@ -1810,6 +1838,7 @@
               <a:rPr lang="en-US"/>
               <a:t>Click to edit Master text styles</a:t>
             </a:r>
+            <a:endParaRPr lang="en-US"/>
           </a:p>
         </p:txBody>
       </p:sp>
@@ -1838,6 +1867,7 @@
               <a:rPr lang="en-US"/>
               <a:t>Click to edit Master text styles</a:t>
             </a:r>
+            <a:endParaRPr lang="en-US"/>
           </a:p>
           <a:p>
             <a:pPr lvl="1"/>
@@ -1845,6 +1875,7 @@
               <a:rPr lang="en-US"/>
               <a:t>Second level</a:t>
             </a:r>
+            <a:endParaRPr lang="en-US"/>
           </a:p>
           <a:p>
             <a:pPr lvl="2"/>
@@ -1852,6 +1883,7 @@
               <a:rPr lang="en-US"/>
               <a:t>Third level</a:t>
             </a:r>
+            <a:endParaRPr lang="en-US"/>
           </a:p>
           <a:p>
             <a:pPr lvl="3"/>
@@ -1859,6 +1891,7 @@
               <a:rPr lang="en-US"/>
               <a:t>Fourth level</a:t>
             </a:r>
+            <a:endParaRPr lang="en-US"/>
           </a:p>
           <a:p>
             <a:pPr lvl="4"/>
@@ -1866,6 +1899,7 @@
               <a:rPr lang="en-US"/>
               <a:t>Fifth level</a:t>
             </a:r>
+            <a:endParaRPr lang="en-US"/>
           </a:p>
         </p:txBody>
       </p:sp>
@@ -1931,6 +1965,7 @@
               <a:rPr lang="en-US"/>
               <a:t>Click to edit Master text styles</a:t>
             </a:r>
+            <a:endParaRPr lang="en-US"/>
           </a:p>
         </p:txBody>
       </p:sp>
@@ -1959,6 +1994,7 @@
               <a:rPr lang="en-US"/>
               <a:t>Click to edit Master text styles</a:t>
             </a:r>
+            <a:endParaRPr lang="en-US"/>
           </a:p>
           <a:p>
             <a:pPr lvl="1"/>
@@ -1966,6 +2002,7 @@
               <a:rPr lang="en-US"/>
               <a:t>Second level</a:t>
             </a:r>
+            <a:endParaRPr lang="en-US"/>
           </a:p>
           <a:p>
             <a:pPr lvl="2"/>
@@ -1973,6 +2010,7 @@
               <a:rPr lang="en-US"/>
               <a:t>Third level</a:t>
             </a:r>
+            <a:endParaRPr lang="en-US"/>
           </a:p>
           <a:p>
             <a:pPr lvl="3"/>
@@ -1980,6 +2018,7 @@
               <a:rPr lang="en-US"/>
               <a:t>Fourth level</a:t>
             </a:r>
+            <a:endParaRPr lang="en-US"/>
           </a:p>
           <a:p>
             <a:pPr lvl="4"/>
@@ -1987,6 +2026,7 @@
               <a:rPr lang="en-US"/>
               <a:t>Fifth level</a:t>
             </a:r>
+            <a:endParaRPr lang="en-US"/>
           </a:p>
         </p:txBody>
       </p:sp>
@@ -2007,7 +2047,6 @@
           <a:p>
             <a:fld id="{63A1C593-65D0-4073-BCC9-577B9352EA97}" type="datetimeFigureOut">
               <a:rPr lang="en-US" smtClean="0"/>
-              <a:t>4/22/26</a:t>
             </a:fld>
             <a:endParaRPr lang="en-US"/>
           </a:p>
@@ -2032,6 +2071,7 @@
               <a:rPr lang="en-US"/>
               <a:t>[Copyright Info]</a:t>
             </a:r>
+            <a:endParaRPr lang="en-US"/>
           </a:p>
         </p:txBody>
       </p:sp>
@@ -2052,7 +2092,6 @@
           <a:p>
             <a:fld id="{9B618960-8005-486C-9A75-10CB2AAC16F9}" type="slidenum">
               <a:rPr lang="en-US" smtClean="0"/>
-              <a:t>‹#›</a:t>
             </a:fld>
             <a:endParaRPr lang="en-US"/>
           </a:p>
@@ -2103,6 +2142,7 @@
               <a:rPr lang="en-US"/>
               <a:t>Click to edit Master title style</a:t>
             </a:r>
+            <a:endParaRPr lang="en-US"/>
           </a:p>
         </p:txBody>
       </p:sp>
@@ -2123,7 +2163,6 @@
           <a:p>
             <a:fld id="{63A1C593-65D0-4073-BCC9-577B9352EA97}" type="datetimeFigureOut">
               <a:rPr lang="en-US" smtClean="0"/>
-              <a:t>4/22/26</a:t>
             </a:fld>
             <a:endParaRPr lang="en-US"/>
           </a:p>
@@ -2148,6 +2187,7 @@
               <a:rPr lang="en-US"/>
               <a:t>[Copyright Info]</a:t>
             </a:r>
+            <a:endParaRPr lang="en-US"/>
           </a:p>
         </p:txBody>
       </p:sp>
@@ -2168,7 +2208,6 @@
           <a:p>
             <a:fld id="{9B618960-8005-486C-9A75-10CB2AAC16F9}" type="slidenum">
               <a:rPr lang="en-US" smtClean="0"/>
-              <a:t>‹#›</a:t>
             </a:fld>
             <a:endParaRPr lang="en-US"/>
           </a:p>
@@ -2217,7 +2256,6 @@
           <a:p>
             <a:fld id="{63A1C593-65D0-4073-BCC9-577B9352EA97}" type="datetimeFigureOut">
               <a:rPr lang="en-US" smtClean="0"/>
-              <a:t>4/22/26</a:t>
             </a:fld>
             <a:endParaRPr lang="en-US"/>
           </a:p>
@@ -2242,6 +2280,7 @@
               <a:rPr lang="en-US"/>
               <a:t>[Copyright Info]</a:t>
             </a:r>
+            <a:endParaRPr lang="en-US"/>
           </a:p>
         </p:txBody>
       </p:sp>
@@ -2262,7 +2301,6 @@
           <a:p>
             <a:fld id="{9B618960-8005-486C-9A75-10CB2AAC16F9}" type="slidenum">
               <a:rPr lang="en-US" smtClean="0"/>
-              <a:t>‹#›</a:t>
             </a:fld>
             <a:endParaRPr lang="en-US"/>
           </a:p>
@@ -2322,6 +2360,7 @@
               <a:rPr lang="en-US"/>
               <a:t>Click to edit Master title style</a:t>
             </a:r>
+            <a:endParaRPr lang="en-US"/>
           </a:p>
         </p:txBody>
       </p:sp>
@@ -2378,6 +2417,7 @@
               <a:rPr lang="en-US"/>
               <a:t>Click to edit Master text styles</a:t>
             </a:r>
+            <a:endParaRPr lang="en-US"/>
           </a:p>
           <a:p>
             <a:pPr lvl="1"/>
@@ -2385,6 +2425,7 @@
               <a:rPr lang="en-US"/>
               <a:t>Second level</a:t>
             </a:r>
+            <a:endParaRPr lang="en-US"/>
           </a:p>
           <a:p>
             <a:pPr lvl="2"/>
@@ -2392,6 +2433,7 @@
               <a:rPr lang="en-US"/>
               <a:t>Third level</a:t>
             </a:r>
+            <a:endParaRPr lang="en-US"/>
           </a:p>
           <a:p>
             <a:pPr lvl="3"/>
@@ -2399,6 +2441,7 @@
               <a:rPr lang="en-US"/>
               <a:t>Fourth level</a:t>
             </a:r>
+            <a:endParaRPr lang="en-US"/>
           </a:p>
           <a:p>
             <a:pPr lvl="4"/>
@@ -2406,6 +2449,7 @@
               <a:rPr lang="en-US"/>
               <a:t>Fifth level</a:t>
             </a:r>
+            <a:endParaRPr lang="en-US"/>
           </a:p>
         </p:txBody>
       </p:sp>
@@ -2471,6 +2515,7 @@
               <a:rPr lang="en-US"/>
               <a:t>Click to edit Master text styles</a:t>
             </a:r>
+            <a:endParaRPr lang="en-US"/>
           </a:p>
         </p:txBody>
       </p:sp>
@@ -2491,7 +2536,6 @@
           <a:p>
             <a:fld id="{63A1C593-65D0-4073-BCC9-577B9352EA97}" type="datetimeFigureOut">
               <a:rPr lang="en-US" smtClean="0"/>
-              <a:t>4/22/26</a:t>
             </a:fld>
             <a:endParaRPr lang="en-US"/>
           </a:p>
@@ -2516,6 +2560,7 @@
               <a:rPr lang="en-US"/>
               <a:t>[Copyright Info]</a:t>
             </a:r>
+            <a:endParaRPr lang="en-US"/>
           </a:p>
         </p:txBody>
       </p:sp>
@@ -2536,7 +2581,6 @@
           <a:p>
             <a:fld id="{9B618960-8005-486C-9A75-10CB2AAC16F9}" type="slidenum">
               <a:rPr lang="en-US" smtClean="0"/>
-              <a:t>‹#›</a:t>
             </a:fld>
             <a:endParaRPr lang="en-US"/>
           </a:p>
@@ -2596,6 +2640,7 @@
               <a:rPr lang="en-US"/>
               <a:t>Click to edit Master title style</a:t>
             </a:r>
+            <a:endParaRPr lang="en-US"/>
           </a:p>
         </p:txBody>
       </p:sp>
@@ -2722,6 +2767,7 @@
               <a:rPr lang="en-US"/>
               <a:t>Click to edit Master text styles</a:t>
             </a:r>
+            <a:endParaRPr lang="en-US"/>
           </a:p>
         </p:txBody>
       </p:sp>
@@ -2742,7 +2788,6 @@
           <a:p>
             <a:fld id="{63A1C593-65D0-4073-BCC9-577B9352EA97}" type="datetimeFigureOut">
               <a:rPr lang="en-US" smtClean="0"/>
-              <a:t>4/22/26</a:t>
             </a:fld>
             <a:endParaRPr lang="en-US"/>
           </a:p>
@@ -2767,6 +2812,7 @@
               <a:rPr lang="en-US"/>
               <a:t>[Copyright Info]</a:t>
             </a:r>
+            <a:endParaRPr lang="en-US"/>
           </a:p>
         </p:txBody>
       </p:sp>
@@ -2787,7 +2833,6 @@
           <a:p>
             <a:fld id="{9B618960-8005-486C-9A75-10CB2AAC16F9}" type="slidenum">
               <a:rPr lang="en-US" smtClean="0"/>
-              <a:t>‹#›</a:t>
             </a:fld>
             <a:endParaRPr lang="en-US"/>
           </a:p>
@@ -2808,7 +2853,7 @@
     <p:bg>
       <p:bgPr>
         <a:blipFill rotWithShape="1">
-          <a:blip r:embed="rId13"/>
+          <a:blip r:embed="rId12"/>
           <a:stretch>
             <a:fillRect/>
           </a:stretch>
@@ -2859,6 +2904,7 @@
               <a:rPr lang="en-US"/>
               <a:t>Click to edit Master title style</a:t>
             </a:r>
+            <a:endParaRPr lang="en-US"/>
           </a:p>
         </p:txBody>
       </p:sp>
@@ -2892,6 +2938,7 @@
               <a:rPr lang="en-US"/>
               <a:t>Click to edit Master text styles</a:t>
             </a:r>
+            <a:endParaRPr lang="en-US"/>
           </a:p>
           <a:p>
             <a:pPr lvl="1"/>
@@ -2899,6 +2946,7 @@
               <a:rPr lang="en-US"/>
               <a:t>Second level</a:t>
             </a:r>
+            <a:endParaRPr lang="en-US"/>
           </a:p>
           <a:p>
             <a:pPr lvl="2"/>
@@ -2906,6 +2954,7 @@
               <a:rPr lang="en-US"/>
               <a:t>Third level</a:t>
             </a:r>
+            <a:endParaRPr lang="en-US"/>
           </a:p>
           <a:p>
             <a:pPr lvl="3"/>
@@ -2913,6 +2962,7 @@
               <a:rPr lang="en-US"/>
               <a:t>Fourth level</a:t>
             </a:r>
+            <a:endParaRPr lang="en-US"/>
           </a:p>
           <a:p>
             <a:pPr lvl="4"/>
@@ -2920,6 +2970,7 @@
               <a:rPr lang="en-US"/>
               <a:t>Fifth level</a:t>
             </a:r>
+            <a:endParaRPr lang="en-US"/>
           </a:p>
         </p:txBody>
       </p:sp>
@@ -2958,7 +3009,6 @@
           <a:p>
             <a:fld id="{63A1C593-65D0-4073-BCC9-577B9352EA97}" type="datetimeFigureOut">
               <a:rPr lang="en-US" smtClean="0"/>
-              <a:t>4/22/26</a:t>
             </a:fld>
             <a:endParaRPr lang="en-US"/>
           </a:p>
@@ -3003,6 +3053,7 @@
               <a:rPr lang="en-US"/>
               <a:t>[Copyright Info]</a:t>
             </a:r>
+            <a:endParaRPr lang="en-US"/>
           </a:p>
         </p:txBody>
       </p:sp>
@@ -3041,7 +3092,6 @@
           <a:p>
             <a:fld id="{9B618960-8005-486C-9A75-10CB2AAC16F9}" type="slidenum">
               <a:rPr lang="en-US" smtClean="0"/>
-              <a:t>‹#›</a:t>
             </a:fld>
             <a:endParaRPr lang="en-US"/>
           </a:p>
@@ -3353,7 +3403,7 @@
     <p:bg>
       <p:bgPr>
         <a:blipFill>
-          <a:blip r:embed="rId3"/>
+          <a:blip r:embed="rId1"/>
           <a:stretch>
             <a:fillRect/>
           </a:stretch>
@@ -3398,6 +3448,10 @@
               </a:rPr>
               <a:t>[ TITLE ]</a:t>
             </a:r>
+            <a:endParaRPr lang="en-US" sz="4000" b="1">
+              <a:latin typeface="Times New Roman Bold" panose="02020603050405020304" charset="0"/>
+              <a:cs typeface="Times New Roman Bold" panose="02020603050405020304" charset="0"/>
+            </a:endParaRPr>
           </a:p>
         </p:txBody>
       </p:sp>
@@ -3444,7 +3498,12 @@
             <p:ph type="ftr" sz="quarter" idx="11"/>
           </p:nvPr>
         </p:nvSpPr>
-        <p:spPr/>
+        <p:spPr>
+          <a:xfrm>
+            <a:off x="0" y="6356350"/>
+            <a:ext cx="12192635" cy="365125"/>
+          </a:xfrm>
+        </p:spPr>
         <p:txBody>
           <a:bodyPr/>
           <a:lstStyle/>
@@ -3459,6 +3518,13 @@
               </a:rPr>
               <a:t>[Copyright Info]</a:t>
             </a:r>
+            <a:endParaRPr lang="en-US">
+              <a:solidFill>
+                <a:schemeClr val="tx2"/>
+              </a:solidFill>
+              <a:latin typeface="Times New Roman Regular" panose="02020603050405020304" charset="0"/>
+              <a:cs typeface="Times New Roman Regular" panose="02020603050405020304" charset="0"/>
+            </a:endParaRPr>
           </a:p>
         </p:txBody>
       </p:sp>
@@ -3721,8 +3787,6 @@
       </a:bgFillStyleLst>
     </a:fmtScheme>
   </a:themeElements>
-  <a:objectDefaults/>
-  <a:extraClrSchemeLst/>
   <a:extLst>
     <a:ext uri="{05A4C25C-085E-4340-85A3-A5531E510DB2}">
       <thm15:themeFamily xmlns:thm15="http://schemas.microsoft.com/office/thememl/2012/main" name="Office Theme" id="{62F939B6-93AF-4DB8-9C6B-D6C7DFDC589F}" vid="{4A3C46E8-61CC-4603-A589-7422A47A8E4A}"/>
@@ -3982,8 +4046,6 @@
       </a:bgFillStyleLst>
     </a:fmtScheme>
   </a:themeElements>
-  <a:objectDefaults/>
-  <a:extraClrSchemeLst/>
   <a:extLst>
     <a:ext uri="{05A4C25C-085E-4340-85A3-A5531E510DB2}">
       <thm15:themeFamily xmlns:thm15="http://schemas.microsoft.com/office/thememl/2012/main" name="Office Theme" id="{62F939B6-93AF-4DB8-9C6B-D6C7DFDC589F}" vid="{4A3C46E8-61CC-4603-A589-7422A47A8E4A}"/>

--- a/Song Template 1.pptx
+++ b/Song Template 1.pptx
@@ -8,7 +8,7 @@
     <p:notesMasterId r:id="rId4"/>
   </p:notesMasterIdLst>
   <p:sldIdLst>
-    <p:sldId id="5001" r:id="rId3"/>
+    <p:sldId id="256" r:id="rId3"/>
   </p:sldIdLst>
   <p:sldSz cx="12192000" cy="6858000"/>
   <p:notesSz cx="6858000" cy="9144000"/>
@@ -110,7 +110,7 @@
   <p:extLst>
     <p:ext uri="{EFAFB233-063F-42B5-8137-9DF3F51BA10A}">
       <p15:sldGuideLst xmlns:p15="http://schemas.microsoft.com/office/powerpoint/2012/main">
-        <p15:guide id="1" orient="horz" pos="2145" userDrawn="1">
+        <p15:guide id="1" orient="horz" pos="2160" userDrawn="1">
           <p15:clr>
             <a:srgbClr val="A4A3A4"/>
           </p15:clr>
@@ -271,39 +271,39 @@
           <a:p>
             <a:pPr lvl="0"/>
             <a:r>
-              <a:rPr lang="en-US"/>
+              <a:rPr lang="en-US" smtClean="0"/>
               <a:t>Click to edit Master text styles</a:t>
             </a:r>
-            <a:endParaRPr lang="en-US"/>
+            <a:endParaRPr lang="en-US" smtClean="0"/>
           </a:p>
           <a:p>
             <a:pPr lvl="1"/>
             <a:r>
-              <a:rPr lang="en-US"/>
+              <a:rPr lang="en-US" smtClean="0"/>
               <a:t>Second level</a:t>
             </a:r>
-            <a:endParaRPr lang="en-US"/>
+            <a:endParaRPr lang="en-US" smtClean="0"/>
           </a:p>
           <a:p>
             <a:pPr lvl="2"/>
             <a:r>
-              <a:rPr lang="en-US"/>
+              <a:rPr lang="en-US" smtClean="0"/>
               <a:t>Third level</a:t>
             </a:r>
-            <a:endParaRPr lang="en-US"/>
+            <a:endParaRPr lang="en-US" smtClean="0"/>
           </a:p>
           <a:p>
             <a:pPr lvl="3"/>
             <a:r>
-              <a:rPr lang="en-US"/>
+              <a:rPr lang="en-US" smtClean="0"/>
               <a:t>Fourth level</a:t>
             </a:r>
-            <a:endParaRPr lang="en-US"/>
+            <a:endParaRPr lang="en-US" smtClean="0"/>
           </a:p>
           <a:p>
             <a:pPr lvl="4"/>
             <a:r>
-              <a:rPr lang="en-US"/>
+              <a:rPr lang="en-US" smtClean="0"/>
               <a:t>Fifth level</a:t>
             </a:r>
             <a:endParaRPr lang="en-US"/>
@@ -380,53 +380,53 @@
   <p:clrMap bg1="lt1" tx1="dk1" bg2="lt2" tx2="dk2" accent1="accent1" accent2="accent2" accent3="accent3" accent4="accent4" accent5="accent5" accent6="accent6" hlink="hlink" folHlink="folHlink"/>
   <p:notesStyle>
     <a:lvl1pPr marL="0" algn="l" defTabSz="914400" rtl="0" eaLnBrk="1" latinLnBrk="0" hangingPunct="1">
-      <a:defRPr sz="1600" kern="1200">
+      <a:defRPr sz="1200" kern="1200">
         <a:solidFill>
           <a:schemeClr val="tx1"/>
         </a:solidFill>
-        <a:latin typeface="Courier New Regular" panose="02070609020205020404" charset="0"/>
+        <a:latin typeface="+mn-lt"/>
         <a:ea typeface="+mn-ea"/>
-        <a:cs typeface="Courier New Regular" panose="02070609020205020404" charset="0"/>
+        <a:cs typeface="+mn-cs"/>
       </a:defRPr>
     </a:lvl1pPr>
     <a:lvl2pPr marL="457200" algn="l" defTabSz="914400" rtl="0" eaLnBrk="1" latinLnBrk="0" hangingPunct="1">
-      <a:defRPr sz="1600" kern="1200">
+      <a:defRPr sz="1200" kern="1200">
         <a:solidFill>
           <a:schemeClr val="tx1"/>
         </a:solidFill>
-        <a:latin typeface="Courier New Regular" panose="02070609020205020404" charset="0"/>
+        <a:latin typeface="+mn-lt"/>
         <a:ea typeface="+mn-ea"/>
-        <a:cs typeface="Courier New Regular" panose="02070609020205020404" charset="0"/>
+        <a:cs typeface="+mn-cs"/>
       </a:defRPr>
     </a:lvl2pPr>
     <a:lvl3pPr marL="914400" algn="l" defTabSz="914400" rtl="0" eaLnBrk="1" latinLnBrk="0" hangingPunct="1">
-      <a:defRPr sz="1600" kern="1200">
+      <a:defRPr sz="1200" kern="1200">
         <a:solidFill>
           <a:schemeClr val="tx1"/>
         </a:solidFill>
-        <a:latin typeface="Courier New Regular" panose="02070609020205020404" charset="0"/>
+        <a:latin typeface="+mn-lt"/>
         <a:ea typeface="+mn-ea"/>
-        <a:cs typeface="Courier New Regular" panose="02070609020205020404" charset="0"/>
+        <a:cs typeface="+mn-cs"/>
       </a:defRPr>
     </a:lvl3pPr>
     <a:lvl4pPr marL="1371600" algn="l" defTabSz="914400" rtl="0" eaLnBrk="1" latinLnBrk="0" hangingPunct="1">
-      <a:defRPr sz="1600" kern="1200">
+      <a:defRPr sz="1200" kern="1200">
         <a:solidFill>
           <a:schemeClr val="tx1"/>
         </a:solidFill>
-        <a:latin typeface="Courier New Regular" panose="02070609020205020404" charset="0"/>
+        <a:latin typeface="+mn-lt"/>
         <a:ea typeface="+mn-ea"/>
-        <a:cs typeface="Courier New Regular" panose="02070609020205020404" charset="0"/>
+        <a:cs typeface="+mn-cs"/>
       </a:defRPr>
     </a:lvl4pPr>
     <a:lvl5pPr marL="1828800" algn="l" defTabSz="914400" rtl="0" eaLnBrk="1" latinLnBrk="0" hangingPunct="1">
-      <a:defRPr sz="1400" kern="1200">
+      <a:defRPr sz="1200" kern="1200">
         <a:solidFill>
           <a:schemeClr val="tx1"/>
         </a:solidFill>
-        <a:latin typeface="Courier New Regular" panose="02070609020205020404" charset="0"/>
+        <a:latin typeface="+mn-lt"/>
         <a:ea typeface="+mn-ea"/>
-        <a:cs typeface="Courier New Regular" panose="02070609020205020404" charset="0"/>
+        <a:cs typeface="+mn-cs"/>
       </a:defRPr>
     </a:lvl5pPr>
     <a:lvl6pPr marL="2286000" algn="l" defTabSz="914400" rtl="0" eaLnBrk="1" latinLnBrk="0" hangingPunct="1">
@@ -482,19 +482,12 @@
         <p:cNvGrpSpPr/>
         <p:nvPr/>
       </p:nvGrpSpPr>
-      <p:grpSpPr>
-        <a:xfrm>
-          <a:off x="0" y="0"/>
-          <a:ext cx="0" cy="0"/>
-          <a:chOff x="0" y="0"/>
-          <a:chExt cx="0" cy="0"/>
-        </a:xfrm>
-      </p:grpSpPr>
+      <p:grpSpPr/>
       <p:sp>
         <p:nvSpPr>
           <p:cNvPr id="2" name="Slide Image Placeholder 1"/>
           <p:cNvSpPr>
-            <a:spLocks noGrp="1" noRot="1" noChangeAspect="1"/>
+            <a:spLocks noGrp="1"/>
           </p:cNvSpPr>
           <p:nvPr>
             <p:ph type="sldImg" idx="2"/>
@@ -515,12 +508,12 @@
         <p:spPr/>
         <p:txBody>
           <a:bodyPr/>
-          <a:lstStyle/>
-          <a:p>
-            <a:endParaRPr lang="en-US" altLang="en-US" dirty="0">
-              <a:latin typeface="Courier New" panose="02070609020205020404" pitchFamily="49" charset="0"/>
-              <a:cs typeface="Courier New" panose="02070609020205020404" pitchFamily="49" charset="0"/>
-            </a:endParaRPr>
+          <a:p>
+            <a:r>
+              <a:rPr lang="en-US"/>
+              <a:t>[Presenter Note]</a:t>
+            </a:r>
+            <a:endParaRPr lang="en-US"/>
           </a:p>
         </p:txBody>
       </p:sp>
@@ -574,7 +567,7 @@
           </a:lstStyle>
           <a:p>
             <a:r>
-              <a:rPr lang="en-US"/>
+              <a:rPr lang="en-US" smtClean="0"/>
               <a:t>Click to edit Master title style</a:t>
             </a:r>
             <a:endParaRPr lang="en-US"/>
@@ -639,7 +632,7 @@
           </a:lstStyle>
           <a:p>
             <a:r>
-              <a:rPr lang="en-US"/>
+              <a:rPr lang="en-US" smtClean="0"/>
               <a:t>Click to edit Master subtitle style</a:t>
             </a:r>
             <a:endParaRPr lang="en-US"/>
@@ -656,37 +649,41 @@
             <p:ph type="dt" sz="half" idx="10"/>
           </p:nvPr>
         </p:nvSpPr>
+        <p:spPr>
+          <a:xfrm>
+            <a:off x="838200" y="6356350"/>
+            <a:ext cx="2743200" cy="365125"/>
+          </a:xfrm>
+          <a:prstGeom prst="rect">
+            <a:avLst/>
+          </a:prstGeom>
+        </p:spPr>
+        <p:txBody>
+          <a:bodyPr/>
+          <a:lstStyle/>
+          <a:p>
+            <a:fld id="{63A1C593-65D0-4073-BCC9-577B9352EA97}" type="datetimeFigureOut">
+              <a:rPr lang="en-US" smtClean="0"/>
+            </a:fld>
+            <a:endParaRPr lang="en-US"/>
+          </a:p>
+        </p:txBody>
+      </p:sp>
+      <p:sp>
+        <p:nvSpPr>
+          <p:cNvPr id="5" name="Footer Placeholder 4"/>
+          <p:cNvSpPr>
+            <a:spLocks noGrp="1"/>
+          </p:cNvSpPr>
+          <p:nvPr>
+            <p:ph type="ftr" sz="quarter" idx="11"/>
+          </p:nvPr>
+        </p:nvSpPr>
         <p:spPr/>
         <p:txBody>
           <a:bodyPr/>
           <a:lstStyle/>
           <a:p>
-            <a:fld id="{63A1C593-65D0-4073-BCC9-577B9352EA97}" type="datetimeFigureOut">
-              <a:rPr lang="en-US" smtClean="0"/>
-            </a:fld>
-            <a:endParaRPr lang="en-US"/>
-          </a:p>
-        </p:txBody>
-      </p:sp>
-      <p:sp>
-        <p:nvSpPr>
-          <p:cNvPr id="5" name="Footer Placeholder 4"/>
-          <p:cNvSpPr>
-            <a:spLocks noGrp="1"/>
-          </p:cNvSpPr>
-          <p:nvPr>
-            <p:ph type="ftr" sz="quarter" idx="11"/>
-          </p:nvPr>
-        </p:nvSpPr>
-        <p:spPr/>
-        <p:txBody>
-          <a:bodyPr/>
-          <a:lstStyle/>
-          <a:p>
-            <a:r>
-              <a:rPr lang="en-US"/>
-              <a:t>[Copyright Info]</a:t>
-            </a:r>
             <a:endParaRPr lang="en-US"/>
           </a:p>
         </p:txBody>
@@ -701,7 +698,15 @@
             <p:ph type="sldNum" sz="quarter" idx="12"/>
           </p:nvPr>
         </p:nvSpPr>
-        <p:spPr/>
+        <p:spPr>
+          <a:xfrm>
+            <a:off x="8610600" y="6356350"/>
+            <a:ext cx="2743200" cy="365125"/>
+          </a:xfrm>
+          <a:prstGeom prst="rect">
+            <a:avLst/>
+          </a:prstGeom>
+        </p:spPr>
         <p:txBody>
           <a:bodyPr/>
           <a:lstStyle/>
@@ -718,7 +723,6 @@
   <p:clrMapOvr>
     <a:masterClrMapping/>
   </p:clrMapOvr>
-  <p:hf sldNum="0" hdr="0" dt="0"/>
 </p:sldLayout>
 </file>
 
@@ -755,7 +759,7 @@
           <a:lstStyle/>
           <a:p>
             <a:r>
-              <a:rPr lang="en-US"/>
+              <a:rPr lang="en-US" smtClean="0"/>
               <a:t>Click to edit Master title style</a:t>
             </a:r>
             <a:endParaRPr lang="en-US"/>
@@ -779,39 +783,39 @@
           <a:p>
             <a:pPr lvl="0"/>
             <a:r>
-              <a:rPr lang="en-US"/>
+              <a:rPr lang="en-US" smtClean="0"/>
               <a:t>Click to edit Master text styles</a:t>
             </a:r>
-            <a:endParaRPr lang="en-US"/>
+            <a:endParaRPr lang="en-US" smtClean="0"/>
           </a:p>
           <a:p>
             <a:pPr lvl="1"/>
             <a:r>
-              <a:rPr lang="en-US"/>
+              <a:rPr lang="en-US" smtClean="0"/>
               <a:t>Second level</a:t>
             </a:r>
-            <a:endParaRPr lang="en-US"/>
+            <a:endParaRPr lang="en-US" smtClean="0"/>
           </a:p>
           <a:p>
             <a:pPr lvl="2"/>
             <a:r>
-              <a:rPr lang="en-US"/>
+              <a:rPr lang="en-US" smtClean="0"/>
               <a:t>Third level</a:t>
             </a:r>
-            <a:endParaRPr lang="en-US"/>
+            <a:endParaRPr lang="en-US" smtClean="0"/>
           </a:p>
           <a:p>
             <a:pPr lvl="3"/>
             <a:r>
-              <a:rPr lang="en-US"/>
+              <a:rPr lang="en-US" smtClean="0"/>
               <a:t>Fourth level</a:t>
             </a:r>
-            <a:endParaRPr lang="en-US"/>
+            <a:endParaRPr lang="en-US" smtClean="0"/>
           </a:p>
           <a:p>
             <a:pPr lvl="4"/>
             <a:r>
-              <a:rPr lang="en-US"/>
+              <a:rPr lang="en-US" smtClean="0"/>
               <a:t>Fifth level</a:t>
             </a:r>
             <a:endParaRPr lang="en-US"/>
@@ -828,37 +832,41 @@
             <p:ph type="dt" sz="half" idx="10"/>
           </p:nvPr>
         </p:nvSpPr>
+        <p:spPr>
+          <a:xfrm>
+            <a:off x="838200" y="6356350"/>
+            <a:ext cx="2743200" cy="365125"/>
+          </a:xfrm>
+          <a:prstGeom prst="rect">
+            <a:avLst/>
+          </a:prstGeom>
+        </p:spPr>
+        <p:txBody>
+          <a:bodyPr/>
+          <a:lstStyle/>
+          <a:p>
+            <a:fld id="{63A1C593-65D0-4073-BCC9-577B9352EA97}" type="datetimeFigureOut">
+              <a:rPr lang="en-US" smtClean="0"/>
+            </a:fld>
+            <a:endParaRPr lang="en-US"/>
+          </a:p>
+        </p:txBody>
+      </p:sp>
+      <p:sp>
+        <p:nvSpPr>
+          <p:cNvPr id="5" name="Footer Placeholder 4"/>
+          <p:cNvSpPr>
+            <a:spLocks noGrp="1"/>
+          </p:cNvSpPr>
+          <p:nvPr>
+            <p:ph type="ftr" sz="quarter" idx="11"/>
+          </p:nvPr>
+        </p:nvSpPr>
         <p:spPr/>
         <p:txBody>
           <a:bodyPr/>
           <a:lstStyle/>
           <a:p>
-            <a:fld id="{63A1C593-65D0-4073-BCC9-577B9352EA97}" type="datetimeFigureOut">
-              <a:rPr lang="en-US" smtClean="0"/>
-            </a:fld>
-            <a:endParaRPr lang="en-US"/>
-          </a:p>
-        </p:txBody>
-      </p:sp>
-      <p:sp>
-        <p:nvSpPr>
-          <p:cNvPr id="5" name="Footer Placeholder 4"/>
-          <p:cNvSpPr>
-            <a:spLocks noGrp="1"/>
-          </p:cNvSpPr>
-          <p:nvPr>
-            <p:ph type="ftr" sz="quarter" idx="11"/>
-          </p:nvPr>
-        </p:nvSpPr>
-        <p:spPr/>
-        <p:txBody>
-          <a:bodyPr/>
-          <a:lstStyle/>
-          <a:p>
-            <a:r>
-              <a:rPr lang="en-US"/>
-              <a:t>[Copyright Info]</a:t>
-            </a:r>
             <a:endParaRPr lang="en-US"/>
           </a:p>
         </p:txBody>
@@ -873,7 +881,15 @@
             <p:ph type="sldNum" sz="quarter" idx="12"/>
           </p:nvPr>
         </p:nvSpPr>
-        <p:spPr/>
+        <p:spPr>
+          <a:xfrm>
+            <a:off x="8610600" y="6356350"/>
+            <a:ext cx="2743200" cy="365125"/>
+          </a:xfrm>
+          <a:prstGeom prst="rect">
+            <a:avLst/>
+          </a:prstGeom>
+        </p:spPr>
         <p:txBody>
           <a:bodyPr/>
           <a:lstStyle/>
@@ -890,7 +906,6 @@
   <p:clrMapOvr>
     <a:masterClrMapping/>
   </p:clrMapOvr>
-  <p:hf sldNum="0" hdr="0" dt="0"/>
 </p:sldLayout>
 </file>
 
@@ -932,7 +947,7 @@
           <a:lstStyle/>
           <a:p>
             <a:r>
-              <a:rPr lang="en-US"/>
+              <a:rPr lang="en-US" smtClean="0"/>
               <a:t>Click to edit Master title style</a:t>
             </a:r>
             <a:endParaRPr lang="en-US"/>
@@ -961,39 +976,39 @@
           <a:p>
             <a:pPr lvl="0"/>
             <a:r>
-              <a:rPr lang="en-US"/>
+              <a:rPr lang="en-US" smtClean="0"/>
               <a:t>Click to edit Master text styles</a:t>
             </a:r>
-            <a:endParaRPr lang="en-US"/>
+            <a:endParaRPr lang="en-US" smtClean="0"/>
           </a:p>
           <a:p>
             <a:pPr lvl="1"/>
             <a:r>
-              <a:rPr lang="en-US"/>
+              <a:rPr lang="en-US" smtClean="0"/>
               <a:t>Second level</a:t>
             </a:r>
-            <a:endParaRPr lang="en-US"/>
+            <a:endParaRPr lang="en-US" smtClean="0"/>
           </a:p>
           <a:p>
             <a:pPr lvl="2"/>
             <a:r>
-              <a:rPr lang="en-US"/>
+              <a:rPr lang="en-US" smtClean="0"/>
               <a:t>Third level</a:t>
             </a:r>
-            <a:endParaRPr lang="en-US"/>
+            <a:endParaRPr lang="en-US" smtClean="0"/>
           </a:p>
           <a:p>
             <a:pPr lvl="3"/>
             <a:r>
-              <a:rPr lang="en-US"/>
+              <a:rPr lang="en-US" smtClean="0"/>
               <a:t>Fourth level</a:t>
             </a:r>
-            <a:endParaRPr lang="en-US"/>
+            <a:endParaRPr lang="en-US" smtClean="0"/>
           </a:p>
           <a:p>
             <a:pPr lvl="4"/>
             <a:r>
-              <a:rPr lang="en-US"/>
+              <a:rPr lang="en-US" smtClean="0"/>
               <a:t>Fifth level</a:t>
             </a:r>
             <a:endParaRPr lang="en-US"/>
@@ -1010,37 +1025,41 @@
             <p:ph type="dt" sz="half" idx="10"/>
           </p:nvPr>
         </p:nvSpPr>
+        <p:spPr>
+          <a:xfrm>
+            <a:off x="838200" y="6356350"/>
+            <a:ext cx="2743200" cy="365125"/>
+          </a:xfrm>
+          <a:prstGeom prst="rect">
+            <a:avLst/>
+          </a:prstGeom>
+        </p:spPr>
+        <p:txBody>
+          <a:bodyPr/>
+          <a:lstStyle/>
+          <a:p>
+            <a:fld id="{63A1C593-65D0-4073-BCC9-577B9352EA97}" type="datetimeFigureOut">
+              <a:rPr lang="en-US" smtClean="0"/>
+            </a:fld>
+            <a:endParaRPr lang="en-US"/>
+          </a:p>
+        </p:txBody>
+      </p:sp>
+      <p:sp>
+        <p:nvSpPr>
+          <p:cNvPr id="5" name="Footer Placeholder 4"/>
+          <p:cNvSpPr>
+            <a:spLocks noGrp="1"/>
+          </p:cNvSpPr>
+          <p:nvPr>
+            <p:ph type="ftr" sz="quarter" idx="11"/>
+          </p:nvPr>
+        </p:nvSpPr>
         <p:spPr/>
         <p:txBody>
           <a:bodyPr/>
           <a:lstStyle/>
           <a:p>
-            <a:fld id="{63A1C593-65D0-4073-BCC9-577B9352EA97}" type="datetimeFigureOut">
-              <a:rPr lang="en-US" smtClean="0"/>
-            </a:fld>
-            <a:endParaRPr lang="en-US"/>
-          </a:p>
-        </p:txBody>
-      </p:sp>
-      <p:sp>
-        <p:nvSpPr>
-          <p:cNvPr id="5" name="Footer Placeholder 4"/>
-          <p:cNvSpPr>
-            <a:spLocks noGrp="1"/>
-          </p:cNvSpPr>
-          <p:nvPr>
-            <p:ph type="ftr" sz="quarter" idx="11"/>
-          </p:nvPr>
-        </p:nvSpPr>
-        <p:spPr/>
-        <p:txBody>
-          <a:bodyPr/>
-          <a:lstStyle/>
-          <a:p>
-            <a:r>
-              <a:rPr lang="en-US"/>
-              <a:t>[Copyright Info]</a:t>
-            </a:r>
             <a:endParaRPr lang="en-US"/>
           </a:p>
         </p:txBody>
@@ -1055,7 +1074,15 @@
             <p:ph type="sldNum" sz="quarter" idx="12"/>
           </p:nvPr>
         </p:nvSpPr>
-        <p:spPr/>
+        <p:spPr>
+          <a:xfrm>
+            <a:off x="8610600" y="6356350"/>
+            <a:ext cx="2743200" cy="365125"/>
+          </a:xfrm>
+          <a:prstGeom prst="rect">
+            <a:avLst/>
+          </a:prstGeom>
+        </p:spPr>
         <p:txBody>
           <a:bodyPr/>
           <a:lstStyle/>
@@ -1072,7 +1099,6 @@
   <p:clrMapOvr>
     <a:masterClrMapping/>
   </p:clrMapOvr>
-  <p:hf sldNum="0" hdr="0" dt="0"/>
 </p:sldLayout>
 </file>
 
@@ -1109,7 +1135,7 @@
           <a:lstStyle/>
           <a:p>
             <a:r>
-              <a:rPr lang="en-US"/>
+              <a:rPr lang="en-US" smtClean="0"/>
               <a:t>Click to edit Master title style</a:t>
             </a:r>
             <a:endParaRPr lang="en-US"/>
@@ -1133,39 +1159,39 @@
           <a:p>
             <a:pPr lvl="0"/>
             <a:r>
-              <a:rPr lang="en-US"/>
+              <a:rPr lang="en-US" smtClean="0"/>
               <a:t>Click to edit Master text styles</a:t>
             </a:r>
-            <a:endParaRPr lang="en-US"/>
+            <a:endParaRPr lang="en-US" smtClean="0"/>
           </a:p>
           <a:p>
             <a:pPr lvl="1"/>
             <a:r>
-              <a:rPr lang="en-US"/>
+              <a:rPr lang="en-US" smtClean="0"/>
               <a:t>Second level</a:t>
             </a:r>
-            <a:endParaRPr lang="en-US"/>
+            <a:endParaRPr lang="en-US" smtClean="0"/>
           </a:p>
           <a:p>
             <a:pPr lvl="2"/>
             <a:r>
-              <a:rPr lang="en-US"/>
+              <a:rPr lang="en-US" smtClean="0"/>
               <a:t>Third level</a:t>
             </a:r>
-            <a:endParaRPr lang="en-US"/>
+            <a:endParaRPr lang="en-US" smtClean="0"/>
           </a:p>
           <a:p>
             <a:pPr lvl="3"/>
             <a:r>
-              <a:rPr lang="en-US"/>
+              <a:rPr lang="en-US" smtClean="0"/>
               <a:t>Fourth level</a:t>
             </a:r>
-            <a:endParaRPr lang="en-US"/>
+            <a:endParaRPr lang="en-US" smtClean="0"/>
           </a:p>
           <a:p>
             <a:pPr lvl="4"/>
             <a:r>
-              <a:rPr lang="en-US"/>
+              <a:rPr lang="en-US" smtClean="0"/>
               <a:t>Fifth level</a:t>
             </a:r>
             <a:endParaRPr lang="en-US"/>
@@ -1182,37 +1208,41 @@
             <p:ph type="dt" sz="half" idx="10"/>
           </p:nvPr>
         </p:nvSpPr>
+        <p:spPr>
+          <a:xfrm>
+            <a:off x="838200" y="6356350"/>
+            <a:ext cx="2743200" cy="365125"/>
+          </a:xfrm>
+          <a:prstGeom prst="rect">
+            <a:avLst/>
+          </a:prstGeom>
+        </p:spPr>
+        <p:txBody>
+          <a:bodyPr/>
+          <a:lstStyle/>
+          <a:p>
+            <a:fld id="{63A1C593-65D0-4073-BCC9-577B9352EA97}" type="datetimeFigureOut">
+              <a:rPr lang="en-US" smtClean="0"/>
+            </a:fld>
+            <a:endParaRPr lang="en-US"/>
+          </a:p>
+        </p:txBody>
+      </p:sp>
+      <p:sp>
+        <p:nvSpPr>
+          <p:cNvPr id="5" name="Footer Placeholder 4"/>
+          <p:cNvSpPr>
+            <a:spLocks noGrp="1"/>
+          </p:cNvSpPr>
+          <p:nvPr>
+            <p:ph type="ftr" sz="quarter" idx="11"/>
+          </p:nvPr>
+        </p:nvSpPr>
         <p:spPr/>
         <p:txBody>
           <a:bodyPr/>
           <a:lstStyle/>
           <a:p>
-            <a:fld id="{63A1C593-65D0-4073-BCC9-577B9352EA97}" type="datetimeFigureOut">
-              <a:rPr lang="en-US" smtClean="0"/>
-            </a:fld>
-            <a:endParaRPr lang="en-US"/>
-          </a:p>
-        </p:txBody>
-      </p:sp>
-      <p:sp>
-        <p:nvSpPr>
-          <p:cNvPr id="5" name="Footer Placeholder 4"/>
-          <p:cNvSpPr>
-            <a:spLocks noGrp="1"/>
-          </p:cNvSpPr>
-          <p:nvPr>
-            <p:ph type="ftr" sz="quarter" idx="11"/>
-          </p:nvPr>
-        </p:nvSpPr>
-        <p:spPr/>
-        <p:txBody>
-          <a:bodyPr/>
-          <a:lstStyle/>
-          <a:p>
-            <a:r>
-              <a:rPr lang="en-US"/>
-              <a:t>[Copyright Info]</a:t>
-            </a:r>
             <a:endParaRPr lang="en-US"/>
           </a:p>
         </p:txBody>
@@ -1227,7 +1257,15 @@
             <p:ph type="sldNum" sz="quarter" idx="12"/>
           </p:nvPr>
         </p:nvSpPr>
-        <p:spPr/>
+        <p:spPr>
+          <a:xfrm>
+            <a:off x="8610600" y="6356350"/>
+            <a:ext cx="2743200" cy="365125"/>
+          </a:xfrm>
+          <a:prstGeom prst="rect">
+            <a:avLst/>
+          </a:prstGeom>
+        </p:spPr>
         <p:txBody>
           <a:bodyPr/>
           <a:lstStyle/>
@@ -1244,7 +1282,6 @@
   <p:clrMapOvr>
     <a:masterClrMapping/>
   </p:clrMapOvr>
-  <p:hf sldNum="0" hdr="0" dt="0"/>
 </p:sldLayout>
 </file>
 
@@ -1290,7 +1327,7 @@
           </a:lstStyle>
           <a:p>
             <a:r>
-              <a:rPr lang="en-US"/>
+              <a:rPr lang="en-US" smtClean="0"/>
               <a:t>Click to edit Master title style</a:t>
             </a:r>
             <a:endParaRPr lang="en-US"/>
@@ -1410,10 +1447,10 @@
           <a:p>
             <a:pPr lvl="0"/>
             <a:r>
-              <a:rPr lang="en-US"/>
+              <a:rPr lang="en-US" smtClean="0"/>
               <a:t>Click to edit Master text styles</a:t>
             </a:r>
-            <a:endParaRPr lang="en-US"/>
+            <a:endParaRPr lang="en-US" smtClean="0"/>
           </a:p>
         </p:txBody>
       </p:sp>
@@ -1427,37 +1464,41 @@
             <p:ph type="dt" sz="half" idx="10"/>
           </p:nvPr>
         </p:nvSpPr>
+        <p:spPr>
+          <a:xfrm>
+            <a:off x="838200" y="6356350"/>
+            <a:ext cx="2743200" cy="365125"/>
+          </a:xfrm>
+          <a:prstGeom prst="rect">
+            <a:avLst/>
+          </a:prstGeom>
+        </p:spPr>
+        <p:txBody>
+          <a:bodyPr/>
+          <a:lstStyle/>
+          <a:p>
+            <a:fld id="{63A1C593-65D0-4073-BCC9-577B9352EA97}" type="datetimeFigureOut">
+              <a:rPr lang="en-US" smtClean="0"/>
+            </a:fld>
+            <a:endParaRPr lang="en-US"/>
+          </a:p>
+        </p:txBody>
+      </p:sp>
+      <p:sp>
+        <p:nvSpPr>
+          <p:cNvPr id="5" name="Footer Placeholder 4"/>
+          <p:cNvSpPr>
+            <a:spLocks noGrp="1"/>
+          </p:cNvSpPr>
+          <p:nvPr>
+            <p:ph type="ftr" sz="quarter" idx="11"/>
+          </p:nvPr>
+        </p:nvSpPr>
         <p:spPr/>
         <p:txBody>
           <a:bodyPr/>
           <a:lstStyle/>
           <a:p>
-            <a:fld id="{63A1C593-65D0-4073-BCC9-577B9352EA97}" type="datetimeFigureOut">
-              <a:rPr lang="en-US" smtClean="0"/>
-            </a:fld>
-            <a:endParaRPr lang="en-US"/>
-          </a:p>
-        </p:txBody>
-      </p:sp>
-      <p:sp>
-        <p:nvSpPr>
-          <p:cNvPr id="5" name="Footer Placeholder 4"/>
-          <p:cNvSpPr>
-            <a:spLocks noGrp="1"/>
-          </p:cNvSpPr>
-          <p:nvPr>
-            <p:ph type="ftr" sz="quarter" idx="11"/>
-          </p:nvPr>
-        </p:nvSpPr>
-        <p:spPr/>
-        <p:txBody>
-          <a:bodyPr/>
-          <a:lstStyle/>
-          <a:p>
-            <a:r>
-              <a:rPr lang="en-US"/>
-              <a:t>[Copyright Info]</a:t>
-            </a:r>
             <a:endParaRPr lang="en-US"/>
           </a:p>
         </p:txBody>
@@ -1472,7 +1513,15 @@
             <p:ph type="sldNum" sz="quarter" idx="12"/>
           </p:nvPr>
         </p:nvSpPr>
-        <p:spPr/>
+        <p:spPr>
+          <a:xfrm>
+            <a:off x="8610600" y="6356350"/>
+            <a:ext cx="2743200" cy="365125"/>
+          </a:xfrm>
+          <a:prstGeom prst="rect">
+            <a:avLst/>
+          </a:prstGeom>
+        </p:spPr>
         <p:txBody>
           <a:bodyPr/>
           <a:lstStyle/>
@@ -1489,7 +1538,6 @@
   <p:clrMapOvr>
     <a:masterClrMapping/>
   </p:clrMapOvr>
-  <p:hf sldNum="0" hdr="0" dt="0"/>
 </p:sldLayout>
 </file>
 
@@ -1526,7 +1574,7 @@
           <a:lstStyle/>
           <a:p>
             <a:r>
-              <a:rPr lang="en-US"/>
+              <a:rPr lang="en-US" smtClean="0"/>
               <a:t>Click to edit Master title style</a:t>
             </a:r>
             <a:endParaRPr lang="en-US"/>
@@ -1555,39 +1603,39 @@
           <a:p>
             <a:pPr lvl="0"/>
             <a:r>
-              <a:rPr lang="en-US"/>
+              <a:rPr lang="en-US" smtClean="0"/>
               <a:t>Click to edit Master text styles</a:t>
             </a:r>
-            <a:endParaRPr lang="en-US"/>
+            <a:endParaRPr lang="en-US" smtClean="0"/>
           </a:p>
           <a:p>
             <a:pPr lvl="1"/>
             <a:r>
-              <a:rPr lang="en-US"/>
+              <a:rPr lang="en-US" smtClean="0"/>
               <a:t>Second level</a:t>
             </a:r>
-            <a:endParaRPr lang="en-US"/>
+            <a:endParaRPr lang="en-US" smtClean="0"/>
           </a:p>
           <a:p>
             <a:pPr lvl="2"/>
             <a:r>
-              <a:rPr lang="en-US"/>
+              <a:rPr lang="en-US" smtClean="0"/>
               <a:t>Third level</a:t>
             </a:r>
-            <a:endParaRPr lang="en-US"/>
+            <a:endParaRPr lang="en-US" smtClean="0"/>
           </a:p>
           <a:p>
             <a:pPr lvl="3"/>
             <a:r>
-              <a:rPr lang="en-US"/>
+              <a:rPr lang="en-US" smtClean="0"/>
               <a:t>Fourth level</a:t>
             </a:r>
-            <a:endParaRPr lang="en-US"/>
+            <a:endParaRPr lang="en-US" smtClean="0"/>
           </a:p>
           <a:p>
             <a:pPr lvl="4"/>
             <a:r>
-              <a:rPr lang="en-US"/>
+              <a:rPr lang="en-US" smtClean="0"/>
               <a:t>Fifth level</a:t>
             </a:r>
             <a:endParaRPr lang="en-US"/>
@@ -1616,39 +1664,39 @@
           <a:p>
             <a:pPr lvl="0"/>
             <a:r>
-              <a:rPr lang="en-US"/>
+              <a:rPr lang="en-US" smtClean="0"/>
               <a:t>Click to edit Master text styles</a:t>
             </a:r>
-            <a:endParaRPr lang="en-US"/>
+            <a:endParaRPr lang="en-US" smtClean="0"/>
           </a:p>
           <a:p>
             <a:pPr lvl="1"/>
             <a:r>
-              <a:rPr lang="en-US"/>
+              <a:rPr lang="en-US" smtClean="0"/>
               <a:t>Second level</a:t>
             </a:r>
-            <a:endParaRPr lang="en-US"/>
+            <a:endParaRPr lang="en-US" smtClean="0"/>
           </a:p>
           <a:p>
             <a:pPr lvl="2"/>
             <a:r>
-              <a:rPr lang="en-US"/>
+              <a:rPr lang="en-US" smtClean="0"/>
               <a:t>Third level</a:t>
             </a:r>
-            <a:endParaRPr lang="en-US"/>
+            <a:endParaRPr lang="en-US" smtClean="0"/>
           </a:p>
           <a:p>
             <a:pPr lvl="3"/>
             <a:r>
-              <a:rPr lang="en-US"/>
+              <a:rPr lang="en-US" smtClean="0"/>
               <a:t>Fourth level</a:t>
             </a:r>
-            <a:endParaRPr lang="en-US"/>
+            <a:endParaRPr lang="en-US" smtClean="0"/>
           </a:p>
           <a:p>
             <a:pPr lvl="4"/>
             <a:r>
-              <a:rPr lang="en-US"/>
+              <a:rPr lang="en-US" smtClean="0"/>
               <a:t>Fifth level</a:t>
             </a:r>
             <a:endParaRPr lang="en-US"/>
@@ -1665,37 +1713,41 @@
             <p:ph type="dt" sz="half" idx="10"/>
           </p:nvPr>
         </p:nvSpPr>
+        <p:spPr>
+          <a:xfrm>
+            <a:off x="838200" y="6356350"/>
+            <a:ext cx="2743200" cy="365125"/>
+          </a:xfrm>
+          <a:prstGeom prst="rect">
+            <a:avLst/>
+          </a:prstGeom>
+        </p:spPr>
+        <p:txBody>
+          <a:bodyPr/>
+          <a:lstStyle/>
+          <a:p>
+            <a:fld id="{63A1C593-65D0-4073-BCC9-577B9352EA97}" type="datetimeFigureOut">
+              <a:rPr lang="en-US" smtClean="0"/>
+            </a:fld>
+            <a:endParaRPr lang="en-US"/>
+          </a:p>
+        </p:txBody>
+      </p:sp>
+      <p:sp>
+        <p:nvSpPr>
+          <p:cNvPr id="6" name="Footer Placeholder 5"/>
+          <p:cNvSpPr>
+            <a:spLocks noGrp="1"/>
+          </p:cNvSpPr>
+          <p:nvPr>
+            <p:ph type="ftr" sz="quarter" idx="11"/>
+          </p:nvPr>
+        </p:nvSpPr>
         <p:spPr/>
         <p:txBody>
           <a:bodyPr/>
           <a:lstStyle/>
           <a:p>
-            <a:fld id="{63A1C593-65D0-4073-BCC9-577B9352EA97}" type="datetimeFigureOut">
-              <a:rPr lang="en-US" smtClean="0"/>
-            </a:fld>
-            <a:endParaRPr lang="en-US"/>
-          </a:p>
-        </p:txBody>
-      </p:sp>
-      <p:sp>
-        <p:nvSpPr>
-          <p:cNvPr id="6" name="Footer Placeholder 5"/>
-          <p:cNvSpPr>
-            <a:spLocks noGrp="1"/>
-          </p:cNvSpPr>
-          <p:nvPr>
-            <p:ph type="ftr" sz="quarter" idx="11"/>
-          </p:nvPr>
-        </p:nvSpPr>
-        <p:spPr/>
-        <p:txBody>
-          <a:bodyPr/>
-          <a:lstStyle/>
-          <a:p>
-            <a:r>
-              <a:rPr lang="en-US"/>
-              <a:t>[Copyright Info]</a:t>
-            </a:r>
             <a:endParaRPr lang="en-US"/>
           </a:p>
         </p:txBody>
@@ -1710,7 +1762,15 @@
             <p:ph type="sldNum" sz="quarter" idx="12"/>
           </p:nvPr>
         </p:nvSpPr>
-        <p:spPr/>
+        <p:spPr>
+          <a:xfrm>
+            <a:off x="8610600" y="6356350"/>
+            <a:ext cx="2743200" cy="365125"/>
+          </a:xfrm>
+          <a:prstGeom prst="rect">
+            <a:avLst/>
+          </a:prstGeom>
+        </p:spPr>
         <p:txBody>
           <a:bodyPr/>
           <a:lstStyle/>
@@ -1727,7 +1787,6 @@
   <p:clrMapOvr>
     <a:masterClrMapping/>
   </p:clrMapOvr>
-  <p:hf sldNum="0" hdr="0" dt="0"/>
 </p:sldLayout>
 </file>
 
@@ -1769,7 +1828,7 @@
           <a:lstStyle/>
           <a:p>
             <a:r>
-              <a:rPr lang="en-US"/>
+              <a:rPr lang="en-US" smtClean="0"/>
               <a:t>Click to edit Master title style</a:t>
             </a:r>
             <a:endParaRPr lang="en-US"/>
@@ -1835,10 +1894,10 @@
           <a:p>
             <a:pPr lvl="0"/>
             <a:r>
-              <a:rPr lang="en-US"/>
+              <a:rPr lang="en-US" smtClean="0"/>
               <a:t>Click to edit Master text styles</a:t>
             </a:r>
-            <a:endParaRPr lang="en-US"/>
+            <a:endParaRPr lang="en-US" smtClean="0"/>
           </a:p>
         </p:txBody>
       </p:sp>
@@ -1864,39 +1923,39 @@
           <a:p>
             <a:pPr lvl="0"/>
             <a:r>
-              <a:rPr lang="en-US"/>
+              <a:rPr lang="en-US" smtClean="0"/>
               <a:t>Click to edit Master text styles</a:t>
             </a:r>
-            <a:endParaRPr lang="en-US"/>
+            <a:endParaRPr lang="en-US" smtClean="0"/>
           </a:p>
           <a:p>
             <a:pPr lvl="1"/>
             <a:r>
-              <a:rPr lang="en-US"/>
+              <a:rPr lang="en-US" smtClean="0"/>
               <a:t>Second level</a:t>
             </a:r>
-            <a:endParaRPr lang="en-US"/>
+            <a:endParaRPr lang="en-US" smtClean="0"/>
           </a:p>
           <a:p>
             <a:pPr lvl="2"/>
             <a:r>
-              <a:rPr lang="en-US"/>
+              <a:rPr lang="en-US" smtClean="0"/>
               <a:t>Third level</a:t>
             </a:r>
-            <a:endParaRPr lang="en-US"/>
+            <a:endParaRPr lang="en-US" smtClean="0"/>
           </a:p>
           <a:p>
             <a:pPr lvl="3"/>
             <a:r>
-              <a:rPr lang="en-US"/>
+              <a:rPr lang="en-US" smtClean="0"/>
               <a:t>Fourth level</a:t>
             </a:r>
-            <a:endParaRPr lang="en-US"/>
+            <a:endParaRPr lang="en-US" smtClean="0"/>
           </a:p>
           <a:p>
             <a:pPr lvl="4"/>
             <a:r>
-              <a:rPr lang="en-US"/>
+              <a:rPr lang="en-US" smtClean="0"/>
               <a:t>Fifth level</a:t>
             </a:r>
             <a:endParaRPr lang="en-US"/>
@@ -1962,10 +2021,10 @@
           <a:p>
             <a:pPr lvl="0"/>
             <a:r>
-              <a:rPr lang="en-US"/>
+              <a:rPr lang="en-US" smtClean="0"/>
               <a:t>Click to edit Master text styles</a:t>
             </a:r>
-            <a:endParaRPr lang="en-US"/>
+            <a:endParaRPr lang="en-US" smtClean="0"/>
           </a:p>
         </p:txBody>
       </p:sp>
@@ -1991,39 +2050,39 @@
           <a:p>
             <a:pPr lvl="0"/>
             <a:r>
-              <a:rPr lang="en-US"/>
+              <a:rPr lang="en-US" smtClean="0"/>
               <a:t>Click to edit Master text styles</a:t>
             </a:r>
-            <a:endParaRPr lang="en-US"/>
+            <a:endParaRPr lang="en-US" smtClean="0"/>
           </a:p>
           <a:p>
             <a:pPr lvl="1"/>
             <a:r>
-              <a:rPr lang="en-US"/>
+              <a:rPr lang="en-US" smtClean="0"/>
               <a:t>Second level</a:t>
             </a:r>
-            <a:endParaRPr lang="en-US"/>
+            <a:endParaRPr lang="en-US" smtClean="0"/>
           </a:p>
           <a:p>
             <a:pPr lvl="2"/>
             <a:r>
-              <a:rPr lang="en-US"/>
+              <a:rPr lang="en-US" smtClean="0"/>
               <a:t>Third level</a:t>
             </a:r>
-            <a:endParaRPr lang="en-US"/>
+            <a:endParaRPr lang="en-US" smtClean="0"/>
           </a:p>
           <a:p>
             <a:pPr lvl="3"/>
             <a:r>
-              <a:rPr lang="en-US"/>
+              <a:rPr lang="en-US" smtClean="0"/>
               <a:t>Fourth level</a:t>
             </a:r>
-            <a:endParaRPr lang="en-US"/>
+            <a:endParaRPr lang="en-US" smtClean="0"/>
           </a:p>
           <a:p>
             <a:pPr lvl="4"/>
             <a:r>
-              <a:rPr lang="en-US"/>
+              <a:rPr lang="en-US" smtClean="0"/>
               <a:t>Fifth level</a:t>
             </a:r>
             <a:endParaRPr lang="en-US"/>
@@ -2040,37 +2099,41 @@
             <p:ph type="dt" sz="half" idx="10"/>
           </p:nvPr>
         </p:nvSpPr>
+        <p:spPr>
+          <a:xfrm>
+            <a:off x="838200" y="6356350"/>
+            <a:ext cx="2743200" cy="365125"/>
+          </a:xfrm>
+          <a:prstGeom prst="rect">
+            <a:avLst/>
+          </a:prstGeom>
+        </p:spPr>
+        <p:txBody>
+          <a:bodyPr/>
+          <a:lstStyle/>
+          <a:p>
+            <a:fld id="{63A1C593-65D0-4073-BCC9-577B9352EA97}" type="datetimeFigureOut">
+              <a:rPr lang="en-US" smtClean="0"/>
+            </a:fld>
+            <a:endParaRPr lang="en-US"/>
+          </a:p>
+        </p:txBody>
+      </p:sp>
+      <p:sp>
+        <p:nvSpPr>
+          <p:cNvPr id="8" name="Footer Placeholder 7"/>
+          <p:cNvSpPr>
+            <a:spLocks noGrp="1"/>
+          </p:cNvSpPr>
+          <p:nvPr>
+            <p:ph type="ftr" sz="quarter" idx="11"/>
+          </p:nvPr>
+        </p:nvSpPr>
         <p:spPr/>
         <p:txBody>
           <a:bodyPr/>
           <a:lstStyle/>
           <a:p>
-            <a:fld id="{63A1C593-65D0-4073-BCC9-577B9352EA97}" type="datetimeFigureOut">
-              <a:rPr lang="en-US" smtClean="0"/>
-            </a:fld>
-            <a:endParaRPr lang="en-US"/>
-          </a:p>
-        </p:txBody>
-      </p:sp>
-      <p:sp>
-        <p:nvSpPr>
-          <p:cNvPr id="8" name="Footer Placeholder 7"/>
-          <p:cNvSpPr>
-            <a:spLocks noGrp="1"/>
-          </p:cNvSpPr>
-          <p:nvPr>
-            <p:ph type="ftr" sz="quarter" idx="11"/>
-          </p:nvPr>
-        </p:nvSpPr>
-        <p:spPr/>
-        <p:txBody>
-          <a:bodyPr/>
-          <a:lstStyle/>
-          <a:p>
-            <a:r>
-              <a:rPr lang="en-US"/>
-              <a:t>[Copyright Info]</a:t>
-            </a:r>
             <a:endParaRPr lang="en-US"/>
           </a:p>
         </p:txBody>
@@ -2085,7 +2148,15 @@
             <p:ph type="sldNum" sz="quarter" idx="12"/>
           </p:nvPr>
         </p:nvSpPr>
-        <p:spPr/>
+        <p:spPr>
+          <a:xfrm>
+            <a:off x="8610600" y="6356350"/>
+            <a:ext cx="2743200" cy="365125"/>
+          </a:xfrm>
+          <a:prstGeom prst="rect">
+            <a:avLst/>
+          </a:prstGeom>
+        </p:spPr>
         <p:txBody>
           <a:bodyPr/>
           <a:lstStyle/>
@@ -2102,7 +2173,6 @@
   <p:clrMapOvr>
     <a:masterClrMapping/>
   </p:clrMapOvr>
-  <p:hf sldNum="0" hdr="0" dt="0"/>
 </p:sldLayout>
 </file>
 
@@ -2139,7 +2209,7 @@
           <a:lstStyle/>
           <a:p>
             <a:r>
-              <a:rPr lang="en-US"/>
+              <a:rPr lang="en-US" smtClean="0"/>
               <a:t>Click to edit Master title style</a:t>
             </a:r>
             <a:endParaRPr lang="en-US"/>
@@ -2156,37 +2226,41 @@
             <p:ph type="dt" sz="half" idx="10"/>
           </p:nvPr>
         </p:nvSpPr>
+        <p:spPr>
+          <a:xfrm>
+            <a:off x="838200" y="6356350"/>
+            <a:ext cx="2743200" cy="365125"/>
+          </a:xfrm>
+          <a:prstGeom prst="rect">
+            <a:avLst/>
+          </a:prstGeom>
+        </p:spPr>
+        <p:txBody>
+          <a:bodyPr/>
+          <a:lstStyle/>
+          <a:p>
+            <a:fld id="{63A1C593-65D0-4073-BCC9-577B9352EA97}" type="datetimeFigureOut">
+              <a:rPr lang="en-US" smtClean="0"/>
+            </a:fld>
+            <a:endParaRPr lang="en-US"/>
+          </a:p>
+        </p:txBody>
+      </p:sp>
+      <p:sp>
+        <p:nvSpPr>
+          <p:cNvPr id="4" name="Footer Placeholder 3"/>
+          <p:cNvSpPr>
+            <a:spLocks noGrp="1"/>
+          </p:cNvSpPr>
+          <p:nvPr>
+            <p:ph type="ftr" sz="quarter" idx="11"/>
+          </p:nvPr>
+        </p:nvSpPr>
         <p:spPr/>
         <p:txBody>
           <a:bodyPr/>
           <a:lstStyle/>
           <a:p>
-            <a:fld id="{63A1C593-65D0-4073-BCC9-577B9352EA97}" type="datetimeFigureOut">
-              <a:rPr lang="en-US" smtClean="0"/>
-            </a:fld>
-            <a:endParaRPr lang="en-US"/>
-          </a:p>
-        </p:txBody>
-      </p:sp>
-      <p:sp>
-        <p:nvSpPr>
-          <p:cNvPr id="4" name="Footer Placeholder 3"/>
-          <p:cNvSpPr>
-            <a:spLocks noGrp="1"/>
-          </p:cNvSpPr>
-          <p:nvPr>
-            <p:ph type="ftr" sz="quarter" idx="11"/>
-          </p:nvPr>
-        </p:nvSpPr>
-        <p:spPr/>
-        <p:txBody>
-          <a:bodyPr/>
-          <a:lstStyle/>
-          <a:p>
-            <a:r>
-              <a:rPr lang="en-US"/>
-              <a:t>[Copyright Info]</a:t>
-            </a:r>
             <a:endParaRPr lang="en-US"/>
           </a:p>
         </p:txBody>
@@ -2201,7 +2275,15 @@
             <p:ph type="sldNum" sz="quarter" idx="12"/>
           </p:nvPr>
         </p:nvSpPr>
-        <p:spPr/>
+        <p:spPr>
+          <a:xfrm>
+            <a:off x="8610600" y="6356350"/>
+            <a:ext cx="2743200" cy="365125"/>
+          </a:xfrm>
+          <a:prstGeom prst="rect">
+            <a:avLst/>
+          </a:prstGeom>
+        </p:spPr>
         <p:txBody>
           <a:bodyPr/>
           <a:lstStyle/>
@@ -2218,7 +2300,6 @@
   <p:clrMapOvr>
     <a:masterClrMapping/>
   </p:clrMapOvr>
-  <p:hf sldNum="0" hdr="0" dt="0"/>
 </p:sldLayout>
 </file>
 
@@ -2249,37 +2330,41 @@
             <p:ph type="dt" sz="half" idx="10"/>
           </p:nvPr>
         </p:nvSpPr>
+        <p:spPr>
+          <a:xfrm>
+            <a:off x="838200" y="6356350"/>
+            <a:ext cx="2743200" cy="365125"/>
+          </a:xfrm>
+          <a:prstGeom prst="rect">
+            <a:avLst/>
+          </a:prstGeom>
+        </p:spPr>
+        <p:txBody>
+          <a:bodyPr/>
+          <a:lstStyle/>
+          <a:p>
+            <a:fld id="{63A1C593-65D0-4073-BCC9-577B9352EA97}" type="datetimeFigureOut">
+              <a:rPr lang="en-US" smtClean="0"/>
+            </a:fld>
+            <a:endParaRPr lang="en-US"/>
+          </a:p>
+        </p:txBody>
+      </p:sp>
+      <p:sp>
+        <p:nvSpPr>
+          <p:cNvPr id="3" name="Footer Placeholder 2"/>
+          <p:cNvSpPr>
+            <a:spLocks noGrp="1"/>
+          </p:cNvSpPr>
+          <p:nvPr>
+            <p:ph type="ftr" sz="quarter" idx="11"/>
+          </p:nvPr>
+        </p:nvSpPr>
         <p:spPr/>
         <p:txBody>
           <a:bodyPr/>
           <a:lstStyle/>
           <a:p>
-            <a:fld id="{63A1C593-65D0-4073-BCC9-577B9352EA97}" type="datetimeFigureOut">
-              <a:rPr lang="en-US" smtClean="0"/>
-            </a:fld>
-            <a:endParaRPr lang="en-US"/>
-          </a:p>
-        </p:txBody>
-      </p:sp>
-      <p:sp>
-        <p:nvSpPr>
-          <p:cNvPr id="3" name="Footer Placeholder 2"/>
-          <p:cNvSpPr>
-            <a:spLocks noGrp="1"/>
-          </p:cNvSpPr>
-          <p:nvPr>
-            <p:ph type="ftr" sz="quarter" idx="11"/>
-          </p:nvPr>
-        </p:nvSpPr>
-        <p:spPr/>
-        <p:txBody>
-          <a:bodyPr/>
-          <a:lstStyle/>
-          <a:p>
-            <a:r>
-              <a:rPr lang="en-US"/>
-              <a:t>[Copyright Info]</a:t>
-            </a:r>
             <a:endParaRPr lang="en-US"/>
           </a:p>
         </p:txBody>
@@ -2294,7 +2379,15 @@
             <p:ph type="sldNum" sz="quarter" idx="12"/>
           </p:nvPr>
         </p:nvSpPr>
-        <p:spPr/>
+        <p:spPr>
+          <a:xfrm>
+            <a:off x="8610600" y="6356350"/>
+            <a:ext cx="2743200" cy="365125"/>
+          </a:xfrm>
+          <a:prstGeom prst="rect">
+            <a:avLst/>
+          </a:prstGeom>
+        </p:spPr>
         <p:txBody>
           <a:bodyPr/>
           <a:lstStyle/>
@@ -2311,7 +2404,6 @@
   <p:clrMapOvr>
     <a:masterClrMapping/>
   </p:clrMapOvr>
-  <p:hf sldNum="0" hdr="0" dt="0"/>
 </p:sldLayout>
 </file>
 
@@ -2357,7 +2449,7 @@
           </a:lstStyle>
           <a:p>
             <a:r>
-              <a:rPr lang="en-US"/>
+              <a:rPr lang="en-US" smtClean="0"/>
               <a:t>Click to edit Master title style</a:t>
             </a:r>
             <a:endParaRPr lang="en-US"/>
@@ -2414,39 +2506,39 @@
           <a:p>
             <a:pPr lvl="0"/>
             <a:r>
-              <a:rPr lang="en-US"/>
+              <a:rPr lang="en-US" smtClean="0"/>
               <a:t>Click to edit Master text styles</a:t>
             </a:r>
-            <a:endParaRPr lang="en-US"/>
+            <a:endParaRPr lang="en-US" smtClean="0"/>
           </a:p>
           <a:p>
             <a:pPr lvl="1"/>
             <a:r>
-              <a:rPr lang="en-US"/>
+              <a:rPr lang="en-US" smtClean="0"/>
               <a:t>Second level</a:t>
             </a:r>
-            <a:endParaRPr lang="en-US"/>
+            <a:endParaRPr lang="en-US" smtClean="0"/>
           </a:p>
           <a:p>
             <a:pPr lvl="2"/>
             <a:r>
-              <a:rPr lang="en-US"/>
+              <a:rPr lang="en-US" smtClean="0"/>
               <a:t>Third level</a:t>
             </a:r>
-            <a:endParaRPr lang="en-US"/>
+            <a:endParaRPr lang="en-US" smtClean="0"/>
           </a:p>
           <a:p>
             <a:pPr lvl="3"/>
             <a:r>
-              <a:rPr lang="en-US"/>
+              <a:rPr lang="en-US" smtClean="0"/>
               <a:t>Fourth level</a:t>
             </a:r>
-            <a:endParaRPr lang="en-US"/>
+            <a:endParaRPr lang="en-US" smtClean="0"/>
           </a:p>
           <a:p>
             <a:pPr lvl="4"/>
             <a:r>
-              <a:rPr lang="en-US"/>
+              <a:rPr lang="en-US" smtClean="0"/>
               <a:t>Fifth level</a:t>
             </a:r>
             <a:endParaRPr lang="en-US"/>
@@ -2512,10 +2604,10 @@
           <a:p>
             <a:pPr lvl="0"/>
             <a:r>
-              <a:rPr lang="en-US"/>
+              <a:rPr lang="en-US" smtClean="0"/>
               <a:t>Click to edit Master text styles</a:t>
             </a:r>
-            <a:endParaRPr lang="en-US"/>
+            <a:endParaRPr lang="en-US" smtClean="0"/>
           </a:p>
         </p:txBody>
       </p:sp>
@@ -2529,37 +2621,41 @@
             <p:ph type="dt" sz="half" idx="10"/>
           </p:nvPr>
         </p:nvSpPr>
+        <p:spPr>
+          <a:xfrm>
+            <a:off x="838200" y="6356350"/>
+            <a:ext cx="2743200" cy="365125"/>
+          </a:xfrm>
+          <a:prstGeom prst="rect">
+            <a:avLst/>
+          </a:prstGeom>
+        </p:spPr>
+        <p:txBody>
+          <a:bodyPr/>
+          <a:lstStyle/>
+          <a:p>
+            <a:fld id="{63A1C593-65D0-4073-BCC9-577B9352EA97}" type="datetimeFigureOut">
+              <a:rPr lang="en-US" smtClean="0"/>
+            </a:fld>
+            <a:endParaRPr lang="en-US"/>
+          </a:p>
+        </p:txBody>
+      </p:sp>
+      <p:sp>
+        <p:nvSpPr>
+          <p:cNvPr id="6" name="Footer Placeholder 5"/>
+          <p:cNvSpPr>
+            <a:spLocks noGrp="1"/>
+          </p:cNvSpPr>
+          <p:nvPr>
+            <p:ph type="ftr" sz="quarter" idx="11"/>
+          </p:nvPr>
+        </p:nvSpPr>
         <p:spPr/>
         <p:txBody>
           <a:bodyPr/>
           <a:lstStyle/>
           <a:p>
-            <a:fld id="{63A1C593-65D0-4073-BCC9-577B9352EA97}" type="datetimeFigureOut">
-              <a:rPr lang="en-US" smtClean="0"/>
-            </a:fld>
-            <a:endParaRPr lang="en-US"/>
-          </a:p>
-        </p:txBody>
-      </p:sp>
-      <p:sp>
-        <p:nvSpPr>
-          <p:cNvPr id="6" name="Footer Placeholder 5"/>
-          <p:cNvSpPr>
-            <a:spLocks noGrp="1"/>
-          </p:cNvSpPr>
-          <p:nvPr>
-            <p:ph type="ftr" sz="quarter" idx="11"/>
-          </p:nvPr>
-        </p:nvSpPr>
-        <p:spPr/>
-        <p:txBody>
-          <a:bodyPr/>
-          <a:lstStyle/>
-          <a:p>
-            <a:r>
-              <a:rPr lang="en-US"/>
-              <a:t>[Copyright Info]</a:t>
-            </a:r>
             <a:endParaRPr lang="en-US"/>
           </a:p>
         </p:txBody>
@@ -2574,7 +2670,15 @@
             <p:ph type="sldNum" sz="quarter" idx="12"/>
           </p:nvPr>
         </p:nvSpPr>
-        <p:spPr/>
+        <p:spPr>
+          <a:xfrm>
+            <a:off x="8610600" y="6356350"/>
+            <a:ext cx="2743200" cy="365125"/>
+          </a:xfrm>
+          <a:prstGeom prst="rect">
+            <a:avLst/>
+          </a:prstGeom>
+        </p:spPr>
         <p:txBody>
           <a:bodyPr/>
           <a:lstStyle/>
@@ -2591,7 +2695,6 @@
   <p:clrMapOvr>
     <a:masterClrMapping/>
   </p:clrMapOvr>
-  <p:hf sldNum="0" hdr="0" dt="0"/>
 </p:sldLayout>
 </file>
 
@@ -2637,7 +2740,7 @@
           </a:lstStyle>
           <a:p>
             <a:r>
-              <a:rPr lang="en-US"/>
+              <a:rPr lang="en-US" smtClean="0"/>
               <a:t>Click to edit Master title style</a:t>
             </a:r>
             <a:endParaRPr lang="en-US"/>
@@ -2764,10 +2867,10 @@
           <a:p>
             <a:pPr lvl="0"/>
             <a:r>
-              <a:rPr lang="en-US"/>
+              <a:rPr lang="en-US" smtClean="0"/>
               <a:t>Click to edit Master text styles</a:t>
             </a:r>
-            <a:endParaRPr lang="en-US"/>
+            <a:endParaRPr lang="en-US" smtClean="0"/>
           </a:p>
         </p:txBody>
       </p:sp>
@@ -2781,37 +2884,41 @@
             <p:ph type="dt" sz="half" idx="10"/>
           </p:nvPr>
         </p:nvSpPr>
+        <p:spPr>
+          <a:xfrm>
+            <a:off x="838200" y="6356350"/>
+            <a:ext cx="2743200" cy="365125"/>
+          </a:xfrm>
+          <a:prstGeom prst="rect">
+            <a:avLst/>
+          </a:prstGeom>
+        </p:spPr>
+        <p:txBody>
+          <a:bodyPr/>
+          <a:lstStyle/>
+          <a:p>
+            <a:fld id="{63A1C593-65D0-4073-BCC9-577B9352EA97}" type="datetimeFigureOut">
+              <a:rPr lang="en-US" smtClean="0"/>
+            </a:fld>
+            <a:endParaRPr lang="en-US"/>
+          </a:p>
+        </p:txBody>
+      </p:sp>
+      <p:sp>
+        <p:nvSpPr>
+          <p:cNvPr id="6" name="Footer Placeholder 5"/>
+          <p:cNvSpPr>
+            <a:spLocks noGrp="1"/>
+          </p:cNvSpPr>
+          <p:nvPr>
+            <p:ph type="ftr" sz="quarter" idx="11"/>
+          </p:nvPr>
+        </p:nvSpPr>
         <p:spPr/>
         <p:txBody>
           <a:bodyPr/>
           <a:lstStyle/>
           <a:p>
-            <a:fld id="{63A1C593-65D0-4073-BCC9-577B9352EA97}" type="datetimeFigureOut">
-              <a:rPr lang="en-US" smtClean="0"/>
-            </a:fld>
-            <a:endParaRPr lang="en-US"/>
-          </a:p>
-        </p:txBody>
-      </p:sp>
-      <p:sp>
-        <p:nvSpPr>
-          <p:cNvPr id="6" name="Footer Placeholder 5"/>
-          <p:cNvSpPr>
-            <a:spLocks noGrp="1"/>
-          </p:cNvSpPr>
-          <p:nvPr>
-            <p:ph type="ftr" sz="quarter" idx="11"/>
-          </p:nvPr>
-        </p:nvSpPr>
-        <p:spPr/>
-        <p:txBody>
-          <a:bodyPr/>
-          <a:lstStyle/>
-          <a:p>
-            <a:r>
-              <a:rPr lang="en-US"/>
-              <a:t>[Copyright Info]</a:t>
-            </a:r>
             <a:endParaRPr lang="en-US"/>
           </a:p>
         </p:txBody>
@@ -2826,7 +2933,15 @@
             <p:ph type="sldNum" sz="quarter" idx="12"/>
           </p:nvPr>
         </p:nvSpPr>
-        <p:spPr/>
+        <p:spPr>
+          <a:xfrm>
+            <a:off x="8610600" y="6356350"/>
+            <a:ext cx="2743200" cy="365125"/>
+          </a:xfrm>
+          <a:prstGeom prst="rect">
+            <a:avLst/>
+          </a:prstGeom>
+        </p:spPr>
         <p:txBody>
           <a:bodyPr/>
           <a:lstStyle/>
@@ -2843,7 +2958,6 @@
   <p:clrMapOvr>
     <a:masterClrMapping/>
   </p:clrMapOvr>
-  <p:hf sldNum="0" hdr="0" dt="0"/>
 </p:sldLayout>
 </file>
 
@@ -2852,7 +2966,7 @@
   <p:cSld>
     <p:bg>
       <p:bgPr>
-        <a:blipFill rotWithShape="1">
+        <a:blipFill>
           <a:blip r:embed="rId12"/>
           <a:stretch>
             <a:fillRect/>
@@ -2887,8 +3001,8 @@
         </p:nvSpPr>
         <p:spPr>
           <a:xfrm>
-            <a:off x="0" y="-10160"/>
-            <a:ext cx="12192635" cy="858520"/>
+            <a:off x="838200" y="0"/>
+            <a:ext cx="10515600" cy="875665"/>
           </a:xfrm>
           <a:prstGeom prst="rect">
             <a:avLst/>
@@ -2901,7 +3015,7 @@
           <a:lstStyle/>
           <a:p>
             <a:r>
-              <a:rPr lang="en-US"/>
+              <a:rPr lang="en-US" smtClean="0"/>
               <a:t>Click to edit Master title style</a:t>
             </a:r>
             <a:endParaRPr lang="en-US"/>
@@ -2920,8 +3034,8 @@
         </p:nvSpPr>
         <p:spPr>
           <a:xfrm>
-            <a:off x="838200" y="1825625"/>
-            <a:ext cx="10515600" cy="4351338"/>
+            <a:off x="838200" y="1414145"/>
+            <a:ext cx="10515600" cy="4422775"/>
           </a:xfrm>
           <a:prstGeom prst="rect">
             <a:avLst/>
@@ -2935,39 +3049,39 @@
           <a:p>
             <a:pPr lvl="0"/>
             <a:r>
-              <a:rPr lang="en-US"/>
+              <a:rPr lang="en-US" smtClean="0"/>
               <a:t>Click to edit Master text styles</a:t>
             </a:r>
-            <a:endParaRPr lang="en-US"/>
+            <a:endParaRPr lang="en-US" smtClean="0"/>
           </a:p>
           <a:p>
             <a:pPr lvl="1"/>
             <a:r>
-              <a:rPr lang="en-US"/>
+              <a:rPr lang="en-US" smtClean="0"/>
               <a:t>Second level</a:t>
             </a:r>
-            <a:endParaRPr lang="en-US"/>
+            <a:endParaRPr lang="en-US" smtClean="0"/>
           </a:p>
           <a:p>
             <a:pPr lvl="2"/>
             <a:r>
-              <a:rPr lang="en-US"/>
+              <a:rPr lang="en-US" smtClean="0"/>
               <a:t>Third level</a:t>
             </a:r>
-            <a:endParaRPr lang="en-US"/>
+            <a:endParaRPr lang="en-US" smtClean="0"/>
           </a:p>
           <a:p>
             <a:pPr lvl="3"/>
             <a:r>
-              <a:rPr lang="en-US"/>
+              <a:rPr lang="en-US" smtClean="0"/>
               <a:t>Fourth level</a:t>
             </a:r>
-            <a:endParaRPr lang="en-US"/>
+            <a:endParaRPr lang="en-US" smtClean="0"/>
           </a:p>
           <a:p>
             <a:pPr lvl="4"/>
             <a:r>
-              <a:rPr lang="en-US"/>
+              <a:rPr lang="en-US" smtClean="0"/>
               <a:t>Fifth level</a:t>
             </a:r>
             <a:endParaRPr lang="en-US"/>
@@ -2976,46 +3090,6 @@
       </p:sp>
       <p:sp>
         <p:nvSpPr>
-          <p:cNvPr id="4" name="Date Placeholder 3"/>
-          <p:cNvSpPr>
-            <a:spLocks noGrp="1"/>
-          </p:cNvSpPr>
-          <p:nvPr>
-            <p:ph type="dt" sz="half" idx="2"/>
-          </p:nvPr>
-        </p:nvSpPr>
-        <p:spPr>
-          <a:xfrm>
-            <a:off x="838200" y="6356350"/>
-            <a:ext cx="2743200" cy="365125"/>
-          </a:xfrm>
-          <a:prstGeom prst="rect">
-            <a:avLst/>
-          </a:prstGeom>
-        </p:spPr>
-        <p:txBody>
-          <a:bodyPr vert="horz" lIns="91440" tIns="45720" rIns="91440" bIns="45720" rtlCol="0" anchor="ctr"/>
-          <a:lstStyle>
-            <a:lvl1pPr algn="l">
-              <a:defRPr sz="1200">
-                <a:solidFill>
-                  <a:schemeClr val="tx1">
-                    <a:tint val="75000"/>
-                  </a:schemeClr>
-                </a:solidFill>
-              </a:defRPr>
-            </a:lvl1pPr>
-          </a:lstStyle>
-          <a:p>
-            <a:fld id="{63A1C593-65D0-4073-BCC9-577B9352EA97}" type="datetimeFigureOut">
-              <a:rPr lang="en-US" smtClean="0"/>
-            </a:fld>
-            <a:endParaRPr lang="en-US"/>
-          </a:p>
-        </p:txBody>
-      </p:sp>
-      <p:sp>
-        <p:nvSpPr>
           <p:cNvPr id="5" name="Footer Placeholder 4"/>
           <p:cNvSpPr>
             <a:spLocks noGrp="1"/>
@@ -3026,8 +3100,8 @@
         </p:nvSpPr>
         <p:spPr>
           <a:xfrm>
-            <a:off x="4038600" y="6356350"/>
-            <a:ext cx="4114800" cy="365125"/>
+            <a:off x="0" y="6356350"/>
+            <a:ext cx="12192635" cy="365125"/>
           </a:xfrm>
           <a:prstGeom prst="rect">
             <a:avLst/>
@@ -3049,50 +3123,6 @@
             </a:lvl1pPr>
           </a:lstStyle>
           <a:p>
-            <a:r>
-              <a:rPr lang="en-US"/>
-              <a:t>[Copyright Info]</a:t>
-            </a:r>
-            <a:endParaRPr lang="en-US"/>
-          </a:p>
-        </p:txBody>
-      </p:sp>
-      <p:sp>
-        <p:nvSpPr>
-          <p:cNvPr id="6" name="Slide Number Placeholder 5"/>
-          <p:cNvSpPr>
-            <a:spLocks noGrp="1"/>
-          </p:cNvSpPr>
-          <p:nvPr>
-            <p:ph type="sldNum" sz="quarter" idx="4"/>
-          </p:nvPr>
-        </p:nvSpPr>
-        <p:spPr>
-          <a:xfrm>
-            <a:off x="8610600" y="6356350"/>
-            <a:ext cx="2743200" cy="365125"/>
-          </a:xfrm>
-          <a:prstGeom prst="rect">
-            <a:avLst/>
-          </a:prstGeom>
-        </p:spPr>
-        <p:txBody>
-          <a:bodyPr vert="horz" lIns="91440" tIns="45720" rIns="91440" bIns="45720" rtlCol="0" anchor="ctr"/>
-          <a:lstStyle>
-            <a:lvl1pPr algn="r">
-              <a:defRPr sz="1200">
-                <a:solidFill>
-                  <a:schemeClr val="tx1">
-                    <a:tint val="75000"/>
-                  </a:schemeClr>
-                </a:solidFill>
-              </a:defRPr>
-            </a:lvl1pPr>
-          </a:lstStyle>
-          <a:p>
-            <a:fld id="{9B618960-8005-486C-9A75-10CB2AAC16F9}" type="slidenum">
-              <a:rPr lang="en-US" smtClean="0"/>
-            </a:fld>
             <a:endParaRPr lang="en-US"/>
           </a:p>
         </p:txBody>
@@ -3113,7 +3143,6 @@
     <p:sldLayoutId id="2147483658" r:id="rId10"/>
     <p:sldLayoutId id="2147483659" r:id="rId11"/>
   </p:sldLayoutIdLst>
-  <p:hf sldNum="0" hdr="0" dt="0"/>
   <p:txStyles>
     <p:titleStyle>
       <a:lvl1pPr algn="ctr" defTabSz="914400" rtl="0" eaLnBrk="1" latinLnBrk="0" hangingPunct="1">
@@ -3124,7 +3153,7 @@
           <a:spcPct val="0"/>
         </a:spcBef>
         <a:buNone/>
-        <a:defRPr sz="4400" kern="1200">
+        <a:defRPr sz="4000" kern="1200">
           <a:solidFill>
             <a:schemeClr val="tx1"/>
           </a:solidFill>
@@ -3400,17 +3429,6 @@
 <file path=ppt/slides/slide1.xml><?xml version="1.0" encoding="utf-8"?>
 <p:sld xmlns:a="http://schemas.openxmlformats.org/drawingml/2006/main" xmlns:r="http://schemas.openxmlformats.org/officeDocument/2006/relationships" xmlns:p="http://schemas.openxmlformats.org/presentationml/2006/main">
   <p:cSld>
-    <p:bg>
-      <p:bgPr>
-        <a:blipFill>
-          <a:blip r:embed="rId1"/>
-          <a:stretch>
-            <a:fillRect/>
-          </a:stretch>
-        </a:blipFill>
-        <a:effectLst/>
-      </p:bgPr>
-    </p:bg>
     <p:spTree>
       <p:nvGrpSpPr>
         <p:cNvPr id="1" name=""/>
@@ -3427,7 +3445,7 @@
       </p:grpSpPr>
       <p:sp>
         <p:nvSpPr>
-          <p:cNvPr id="3" name="Title 2"/>
+          <p:cNvPr id="4" name="Title 3"/>
           <p:cNvSpPr>
             <a:spLocks noGrp="1"/>
           </p:cNvSpPr>
@@ -3438,17 +3456,15 @@
         <p:spPr/>
         <p:txBody>
           <a:bodyPr/>
-          <a:lstStyle/>
-          <a:p>
-            <a:pPr algn="ctr"/>
-            <a:r>
-              <a:rPr lang="en-US" sz="4000" b="1">
+          <a:p>
+            <a:r>
+              <a:rPr lang="en-US" b="1">
                 <a:latin typeface="Times New Roman Bold" panose="02020603050405020304" charset="0"/>
                 <a:cs typeface="Times New Roman Bold" panose="02020603050405020304" charset="0"/>
               </a:rPr>
               <a:t>[ TITLE ]</a:t>
             </a:r>
-            <a:endParaRPr lang="en-US" sz="4000" b="1">
+            <a:endParaRPr lang="en-US" b="1">
               <a:latin typeface="Times New Roman Bold" panose="02020603050405020304" charset="0"/>
               <a:cs typeface="Times New Roman Bold" panose="02020603050405020304" charset="0"/>
             </a:endParaRPr>
@@ -3457,7 +3473,7 @@
       </p:sp>
       <p:sp>
         <p:nvSpPr>
-          <p:cNvPr id="2" name="Content Placeholder 1"/>
+          <p:cNvPr id="5" name="Content Placeholder 4"/>
           <p:cNvSpPr>
             <a:spLocks noGrp="1"/>
           </p:cNvSpPr>
@@ -3467,13 +3483,12 @@
         </p:nvSpPr>
         <p:spPr>
           <a:xfrm>
-            <a:off x="838200" y="1320800"/>
-            <a:ext cx="10515600" cy="4534535"/>
+            <a:off x="635" y="1269365"/>
+            <a:ext cx="12191365" cy="4567555"/>
           </a:xfrm>
         </p:spPr>
         <p:txBody>
           <a:bodyPr anchor="ctr" anchorCtr="0"/>
-          <a:lstStyle/>
           <a:p>
             <a:pPr marL="0" indent="0" algn="ctr">
               <a:buNone/>
@@ -3490,7 +3505,7 @@
       </p:sp>
       <p:sp>
         <p:nvSpPr>
-          <p:cNvPr id="5" name="Footer Placeholder 4"/>
+          <p:cNvPr id="6" name="Footer Placeholder 5"/>
           <p:cNvSpPr>
             <a:spLocks noGrp="1"/>
           </p:cNvSpPr>

--- a/Song Template 1.pptx
+++ b/Song Template 1.pptx
@@ -3494,12 +3494,14 @@
               <a:buNone/>
             </a:pPr>
             <a:r>
-              <a:rPr lang="en-US" dirty="0">
+              <a:rPr lang="en-US" sz="3200" dirty="0">
                 <a:sym typeface="+mn-ea"/>
               </a:rPr>
               <a:t>[LYRICS AND CHORDS]</a:t>
             </a:r>
-            <a:endParaRPr lang="en-US"/>
+            <a:endParaRPr lang="en-US" sz="3200" dirty="0">
+              <a:sym typeface="+mn-ea"/>
+            </a:endParaRPr>
           </a:p>
         </p:txBody>
       </p:sp>

--- a/Song Template 1.pptx
+++ b/Song Template 1.pptx
@@ -3453,7 +3453,12 @@
             <p:ph type="title"/>
           </p:nvPr>
         </p:nvSpPr>
-        <p:spPr/>
+        <p:spPr>
+          <a:xfrm>
+            <a:off x="635" y="0"/>
+            <a:ext cx="12192000" cy="875665"/>
+          </a:xfrm>
+        </p:spPr>
         <p:txBody>
           <a:bodyPr/>
           <a:p>
@@ -3462,7 +3467,7 @@
                 <a:latin typeface="Times New Roman Bold" panose="02020603050405020304" charset="0"/>
                 <a:cs typeface="Times New Roman Bold" panose="02020603050405020304" charset="0"/>
               </a:rPr>
-              <a:t>[ TITLE ]</a:t>
+              <a:t>[TITLE]</a:t>
             </a:r>
             <a:endParaRPr lang="en-US" b="1">
               <a:latin typeface="Times New Roman Bold" panose="02020603050405020304" charset="0"/>
